--- a/docs/training/Otta training 3 - The broker portal.pptx
+++ b/docs/training/Otta training 3 - The broker portal.pptx
@@ -29,9 +29,14 @@
     <p:sldId id="277" r:id="rId23"/>
     <p:sldId id="278" r:id="rId24"/>
     <p:sldId id="279" r:id="rId25"/>
+    <p:sldId id="280" r:id="rId26"/>
+    <p:sldId id="281" r:id="rId27"/>
+    <p:sldId id="282" r:id="rId28"/>
+    <p:sldId id="283" r:id="rId29"/>
+    <p:sldId id="284" r:id="rId30"/>
   </p:sldIdLst>
   <p:notesMasterIdLst>
-    <p:notesMasterId r:id="rId26"/>
+    <p:notesMasterId r:id="rId31"/>
   </p:notesMasterIdLst>
   <p:sldSz cx="12192000" cy="6858000"/>
   <p:notesSz cx="6858000" cy="12192000"/>
@@ -130,12 +135,12 @@
   <p:extLst>
     <p:ext uri="{521415D9-36F7-43E2-AB2F-B90AF26B5E84}">
       <p14:sectionLst xmlns:p14="http://schemas.microsoft.com/office/powerpoint/2010/main">
-        <p14:section name="Introduction" id="{45932ef0-165a-b451-cc46-748f1b1d83e9}">
+        <p14:section name="Introduction" id="{7c409fd9-9cf1-cfe4-c7b8-039c73c609ec}">
           <p14:sldIdLst>
             <p14:sldId id="257"/>
           </p14:sldIdLst>
         </p14:section>
-        <p14:section name="Getting access" id="{7b1292eb-a72e-5ea6-d05f-31f20280b545}">
+        <p14:section name="Getting access" id="{55c0b3d7-a9f7-5292-85ae-d711cebb8258}">
           <p14:sldIdLst>
             <p14:sldId id="258"/>
             <p14:sldId id="259"/>
@@ -144,13 +149,13 @@
             <p14:sldId id="262"/>
           </p14:sldIdLst>
         </p14:section>
-        <p14:section name="The dashboard" id="{792e5ffb-d065-e169-8719-9d79ff1f6565}">
+        <p14:section name="The dashboard" id="{aa54de94-c073-10dc-83f2-125792ba9347}">
           <p14:sldIdLst>
             <p14:sldId id="263"/>
             <p14:sldId id="264"/>
           </p14:sldIdLst>
         </p14:section>
-        <p14:section name="Forms and applications" id="{bfa89033-d46a-e191-e048-ecea839ef1db}">
+        <p14:section name="Forms and applications" id="{7b927e8b-8721-d24c-e8dc-f0dbe98eaae8}">
           <p14:sldIdLst>
             <p14:sldId id="265"/>
             <p14:sldId id="266"/>
@@ -161,7 +166,7 @@
             <p14:sldId id="271"/>
           </p14:sldIdLst>
         </p14:section>
-        <p14:section name="Quotes, policies and help" id="{bc2ffda3-fb13-66ee-8596-9bad25a563b7}">
+        <p14:section name="Quotes, policies and claims" id="{c85449b7-376a-73aa-485e-983788f888ba}">
           <p14:sldIdLst>
             <p14:sldId id="272"/>
             <p14:sldId id="273"/>
@@ -172,9 +177,18 @@
             <p14:sldId id="278"/>
           </p14:sldIdLst>
         </p14:section>
-        <p14:section name="Summary" id="{9deb0e59-6d0c-81ea-6181-24e1c3cf5f52}">
+        <p14:section name="Wordings, training and help" id="{c45d2332-16c0-b69b-93e8-03a27474197f}">
           <p14:sldIdLst>
             <p14:sldId id="279"/>
+            <p14:sldId id="280"/>
+            <p14:sldId id="281"/>
+            <p14:sldId id="282"/>
+            <p14:sldId id="283"/>
+          </p14:sldIdLst>
+        </p14:section>
+        <p14:section name="Summary" id="{8ef1b605-b808-bf83-f52f-1a1c080d4d58}">
+          <p14:sldIdLst>
+            <p14:sldId id="284"/>
           </p14:sldIdLst>
         </p14:section>
       </p14:sectionLst>
@@ -757,7 +771,7 @@
           <a:p>
             <a:r>
               <a:rPr lang="en-US" dirty="0"/>
-              <a:t>Forms holds every Otta form, grouped by product. Online forms appear first. Brokers can complete a form themselves, or send it to their client to fill in. Forms that are still PDF only can be downloaded.</a:t>
+              <a:t>Forms holds every Otta form, grouped by product. Online forms appear first. Brokers can complete a form themselves, or create a secure link and send it to their client to fill in. Otta never contacts clients directly. Forms that are still PDF only can be downloaded.</a:t>
             </a:r>
             <a:endParaRPr lang="en-US" dirty="0"/>
           </a:p>
@@ -1021,7 +1035,7 @@
           <a:p>
             <a:r>
               <a:rPr lang="en-US" dirty="0"/>
-              <a:t>To send a form to a client, choose the form first. The client gets a secure link to that form on the Otta website.</a:t>
+              <a:t>To get a client to fill in a form, choose the form first. Otta creates a secure link to that form on the website, which the broker sends to their client.</a:t>
             </a:r>
             <a:endParaRPr lang="en-US" dirty="0"/>
           </a:p>
@@ -1109,7 +1123,7 @@
           <a:p>
             <a:r>
               <a:rPr lang="en-US" dirty="0"/>
-              <a:t>Add the client's name and email, and a note if you like. Otta emails the link for you, with replies coming back to you. Leave the email blank to just copy the link. Links work for 30 days, and when the client submits, it goes straight to Otta and appears in your Applications.</a:t>
+              <a:t>Add the client's name and select Create link. Copy the link and send it to your client however suits you. Otta never emails or contacts clients: only brokers communicate with their clients. Links work for 30 days, and when the client submits, it goes straight to Otta and appears in your Applications.</a:t>
             </a:r>
             <a:endParaRPr lang="en-US" dirty="0"/>
           </a:p>
@@ -1197,7 +1211,7 @@
           <a:p>
             <a:r>
               <a:rPr lang="en-US" dirty="0"/>
-              <a:t>Applications shows everything sent to Otta from the brokerage, and every link sent to clients with its status. Brokers can start a new form or send one from here too.</a:t>
+              <a:t>Applications shows everything sent to Otta from the brokerage, and every client link with its status. Brokers can start a new form or create a client link from here too.</a:t>
             </a:r>
             <a:endParaRPr lang="en-US" dirty="0"/>
           </a:p>
@@ -1285,7 +1299,7 @@
           <a:p>
             <a:r>
               <a:rPr lang="en-US" dirty="0"/>
-              <a:t>Quotes, policies and help. From quote to bound policy, and where to get help.</a:t>
+              <a:t>Quotes, policies and claims. From quote to bound policy, and following claims.</a:t>
             </a:r>
             <a:endParaRPr lang="en-US" dirty="0"/>
           </a:p>
@@ -1549,7 +1563,7 @@
           <a:p>
             <a:r>
               <a:rPr lang="en-US" dirty="0"/>
-              <a:t>What this module covers. Getting access: Signing in, requesting access and emailed sign-in links. The dashboard: What brokers see first and how the menu works. Forms and applications: Completing forms online, sending them to clients and tracking them. Quotes, policies and help: Binding a quote, policies, documents and account settings.</a:t>
+              <a:t>What this module covers. Getting access: Signing in, requesting access and emailed sign-in links. The dashboard: What brokers see first and how the menu works. Forms and applications: Completing forms online, creating client links and tracking them. Quotes, policies and claims: Binding a quote, policies, claims and documents. Wordings, training and help: Policy wordings, the training walkthrough and account settings.</a:t>
             </a:r>
             <a:endParaRPr lang="en-US" dirty="0"/>
           </a:p>
@@ -1725,7 +1739,7 @@
           <a:p>
             <a:r>
               <a:rPr lang="en-US" dirty="0"/>
-              <a:t>Documents holds policy schedules, wordings and other documents for the brokerage's policies.</a:t>
+              <a:t>Claims lists every claim on the brokerage's policies, with its status and amount, plus claims sent online through the claim forms. The tiles show open claims, claims in the last 12 months and what has been paid. Lodge a claim goes to the claim forms, and the page also explains what to do in an emergency.</a:t>
             </a:r>
             <a:endParaRPr lang="en-US" dirty="0"/>
           </a:p>
@@ -1813,7 +1827,7 @@
           <a:p>
             <a:r>
               <a:rPr lang="en-US" dirty="0"/>
-              <a:t>Help and contact lists the email address for each team and our phone number. Brokers talk directly to the underwriters who make the decisions.</a:t>
+              <a:t>Opening a claim shows its details, the amount claimed and paid, who is handling it and each step so far. Brokers can email the claims team straight from the page, quoting the claim number.</a:t>
             </a:r>
             <a:endParaRPr lang="en-US" dirty="0"/>
           </a:p>
@@ -1901,7 +1915,7 @@
           <a:p>
             <a:r>
               <a:rPr lang="en-US" dirty="0"/>
-              <a:t>Your account shows the broker's details and lets them change their password.</a:t>
+              <a:t>Documents holds policy schedules, wordings and other documents for the brokerage's policies.</a:t>
             </a:r>
             <a:endParaRPr lang="en-US" dirty="0"/>
           </a:p>
@@ -1989,7 +2003,7 @@
           <a:p>
             <a:r>
               <a:rPr lang="en-US" dirty="0"/>
-              <a:t>Key points. Brokers request access, Otta approves, and a welcome email sets up the account. Forms can be completed online or sent to the client as a secure link. Everything submitted goes straight to Otta and shows in Applications. Accepted quotes are bound with one instruction from the quote page.</a:t>
+              <a:t>Wordings, training and help. Policy wordings, training and support.</a:t>
             </a:r>
             <a:endParaRPr lang="en-US" dirty="0"/>
           </a:p>
@@ -2013,6 +2027,446 @@
             <a:fld id="{F7021451-1387-4CA6-816F-3879F97B5CBC}" type="slidenum">
               <a:rPr lang="en-US"/>
               <a:t>24</a:t>
+            </a:fld>
+            <a:endParaRPr lang="en-US"/>
+          </a:p>
+        </p:txBody>
+      </p:sp>
+    </p:spTree>
+    <p:extLst>
+      <p:ext uri="{BB962C8B-B14F-4D97-AF65-F5344CB8AC3E}">
+        <p14:creationId xmlns:p14="http://schemas.microsoft.com/office/powerpoint/2010/main" val="1024086991"/>
+      </p:ext>
+    </p:extLst>
+  </p:cSld>
+  <p:clrMapOvr>
+    <a:masterClrMapping/>
+  </p:clrMapOvr>
+</p:notes>
+</file>
+
+<file path=ppt/notesSlides/notesSlide25.xml><?xml version="1.0" encoding="utf-8"?>
+<p:notes xmlns:a="http://schemas.openxmlformats.org/drawingml/2006/main" xmlns:r="http://schemas.openxmlformats.org/officeDocument/2006/relationships" xmlns:p="http://schemas.openxmlformats.org/presentationml/2006/main">
+  <p:cSld>
+    <p:spTree>
+      <p:nvGrpSpPr>
+        <p:cNvPr id="1" name=""/>
+        <p:cNvGrpSpPr/>
+        <p:nvPr/>
+      </p:nvGrpSpPr>
+      <p:grpSpPr>
+        <a:xfrm>
+          <a:off x="0" y="0"/>
+          <a:ext cx="0" cy="0"/>
+          <a:chOff x="0" y="0"/>
+          <a:chExt cx="0" cy="0"/>
+        </a:xfrm>
+      </p:grpSpPr>
+      <p:sp>
+        <p:nvSpPr>
+          <p:cNvPr id="2" name="Slide Image Placeholder 1"/>
+          <p:cNvSpPr>
+            <a:spLocks noGrp="1" noRot="1" noChangeAspect="1"/>
+          </p:cNvSpPr>
+          <p:nvPr>
+            <p:ph type="sldImg"/>
+          </p:nvPr>
+        </p:nvSpPr>
+        <p:spPr/>
+      </p:sp>
+      <p:sp>
+        <p:nvSpPr>
+          <p:cNvPr id="3" name="Notes Placeholder 2"/>
+          <p:cNvSpPr>
+            <a:spLocks noGrp="1"/>
+          </p:cNvSpPr>
+          <p:nvPr>
+            <p:ph type="body" idx="1"/>
+          </p:nvPr>
+        </p:nvSpPr>
+        <p:spPr/>
+        <p:txBody>
+          <a:bodyPr/>
+          <a:lstStyle/>
+          <a:p>
+            <a:r>
+              <a:rPr lang="en-US" dirty="0"/>
+              <a:t>Policy wordings lists the current wording for every Otta product, so brokers can check cover before they recommend it and share it with clients.</a:t>
+            </a:r>
+            <a:endParaRPr lang="en-US" dirty="0"/>
+          </a:p>
+        </p:txBody>
+      </p:sp>
+      <p:sp>
+        <p:nvSpPr>
+          <p:cNvPr id="4" name="Slide Number Placeholder 3"/>
+          <p:cNvSpPr>
+            <a:spLocks noGrp="1"/>
+          </p:cNvSpPr>
+          <p:nvPr>
+            <p:ph type="sldNum" sz="quarter" idx="10"/>
+          </p:nvPr>
+        </p:nvSpPr>
+        <p:spPr/>
+        <p:txBody>
+          <a:bodyPr/>
+          <a:lstStyle/>
+          <a:p>
+            <a:fld id="{F7021451-1387-4CA6-816F-3879F97B5CBC}" type="slidenum">
+              <a:rPr lang="en-US"/>
+              <a:t>25</a:t>
+            </a:fld>
+            <a:endParaRPr lang="en-US"/>
+          </a:p>
+        </p:txBody>
+      </p:sp>
+    </p:spTree>
+    <p:extLst>
+      <p:ext uri="{BB962C8B-B14F-4D97-AF65-F5344CB8AC3E}">
+        <p14:creationId xmlns:p14="http://schemas.microsoft.com/office/powerpoint/2010/main" val="1024086991"/>
+      </p:ext>
+    </p:extLst>
+  </p:cSld>
+  <p:clrMapOvr>
+    <a:masterClrMapping/>
+  </p:clrMapOvr>
+</p:notes>
+</file>
+
+<file path=ppt/notesSlides/notesSlide26.xml><?xml version="1.0" encoding="utf-8"?>
+<p:notes xmlns:a="http://schemas.openxmlformats.org/drawingml/2006/main" xmlns:r="http://schemas.openxmlformats.org/officeDocument/2006/relationships" xmlns:p="http://schemas.openxmlformats.org/presentationml/2006/main">
+  <p:cSld>
+    <p:spTree>
+      <p:nvGrpSpPr>
+        <p:cNvPr id="1" name=""/>
+        <p:cNvGrpSpPr/>
+        <p:nvPr/>
+      </p:nvGrpSpPr>
+      <p:grpSpPr>
+        <a:xfrm>
+          <a:off x="0" y="0"/>
+          <a:ext cx="0" cy="0"/>
+          <a:chOff x="0" y="0"/>
+          <a:chExt cx="0" cy="0"/>
+        </a:xfrm>
+      </p:grpSpPr>
+      <p:sp>
+        <p:nvSpPr>
+          <p:cNvPr id="2" name="Slide Image Placeholder 1"/>
+          <p:cNvSpPr>
+            <a:spLocks noGrp="1" noRot="1" noChangeAspect="1"/>
+          </p:cNvSpPr>
+          <p:nvPr>
+            <p:ph type="sldImg"/>
+          </p:nvPr>
+        </p:nvSpPr>
+        <p:spPr/>
+      </p:sp>
+      <p:sp>
+        <p:nvSpPr>
+          <p:cNvPr id="3" name="Notes Placeholder 2"/>
+          <p:cNvSpPr>
+            <a:spLocks noGrp="1"/>
+          </p:cNvSpPr>
+          <p:nvPr>
+            <p:ph type="body" idx="1"/>
+          </p:nvPr>
+        </p:nvSpPr>
+        <p:spPr/>
+        <p:txBody>
+          <a:bodyPr/>
+          <a:lstStyle/>
+          <a:p>
+            <a:r>
+              <a:rPr lang="en-US" dirty="0"/>
+              <a:t>Training is the broker's own guide to the portal: the five getting started steps, a walkthrough with annotated screenshots, and the guide as a PDF to keep. It is the same guide new brokers receive in their welcome email.</a:t>
+            </a:r>
+            <a:endParaRPr lang="en-US" dirty="0"/>
+          </a:p>
+        </p:txBody>
+      </p:sp>
+      <p:sp>
+        <p:nvSpPr>
+          <p:cNvPr id="4" name="Slide Number Placeholder 3"/>
+          <p:cNvSpPr>
+            <a:spLocks noGrp="1"/>
+          </p:cNvSpPr>
+          <p:nvPr>
+            <p:ph type="sldNum" sz="quarter" idx="10"/>
+          </p:nvPr>
+        </p:nvSpPr>
+        <p:spPr/>
+        <p:txBody>
+          <a:bodyPr/>
+          <a:lstStyle/>
+          <a:p>
+            <a:fld id="{F7021451-1387-4CA6-816F-3879F97B5CBC}" type="slidenum">
+              <a:rPr lang="en-US"/>
+              <a:t>26</a:t>
+            </a:fld>
+            <a:endParaRPr lang="en-US"/>
+          </a:p>
+        </p:txBody>
+      </p:sp>
+    </p:spTree>
+    <p:extLst>
+      <p:ext uri="{BB962C8B-B14F-4D97-AF65-F5344CB8AC3E}">
+        <p14:creationId xmlns:p14="http://schemas.microsoft.com/office/powerpoint/2010/main" val="1024086991"/>
+      </p:ext>
+    </p:extLst>
+  </p:cSld>
+  <p:clrMapOvr>
+    <a:masterClrMapping/>
+  </p:clrMapOvr>
+</p:notes>
+</file>
+
+<file path=ppt/notesSlides/notesSlide27.xml><?xml version="1.0" encoding="utf-8"?>
+<p:notes xmlns:a="http://schemas.openxmlformats.org/drawingml/2006/main" xmlns:r="http://schemas.openxmlformats.org/officeDocument/2006/relationships" xmlns:p="http://schemas.openxmlformats.org/presentationml/2006/main">
+  <p:cSld>
+    <p:spTree>
+      <p:nvGrpSpPr>
+        <p:cNvPr id="1" name=""/>
+        <p:cNvGrpSpPr/>
+        <p:nvPr/>
+      </p:nvGrpSpPr>
+      <p:grpSpPr>
+        <a:xfrm>
+          <a:off x="0" y="0"/>
+          <a:ext cx="0" cy="0"/>
+          <a:chOff x="0" y="0"/>
+          <a:chExt cx="0" cy="0"/>
+        </a:xfrm>
+      </p:grpSpPr>
+      <p:sp>
+        <p:nvSpPr>
+          <p:cNvPr id="2" name="Slide Image Placeholder 1"/>
+          <p:cNvSpPr>
+            <a:spLocks noGrp="1" noRot="1" noChangeAspect="1"/>
+          </p:cNvSpPr>
+          <p:nvPr>
+            <p:ph type="sldImg"/>
+          </p:nvPr>
+        </p:nvSpPr>
+        <p:spPr/>
+      </p:sp>
+      <p:sp>
+        <p:nvSpPr>
+          <p:cNvPr id="3" name="Notes Placeholder 2"/>
+          <p:cNvSpPr>
+            <a:spLocks noGrp="1"/>
+          </p:cNvSpPr>
+          <p:nvPr>
+            <p:ph type="body" idx="1"/>
+          </p:nvPr>
+        </p:nvSpPr>
+        <p:spPr/>
+        <p:txBody>
+          <a:bodyPr/>
+          <a:lstStyle/>
+          <a:p>
+            <a:r>
+              <a:rPr lang="en-US" dirty="0"/>
+              <a:t>Help and contact lists the email address for each team and our phone number. Brokers talk directly to the underwriters who make the decisions.</a:t>
+            </a:r>
+            <a:endParaRPr lang="en-US" dirty="0"/>
+          </a:p>
+        </p:txBody>
+      </p:sp>
+      <p:sp>
+        <p:nvSpPr>
+          <p:cNvPr id="4" name="Slide Number Placeholder 3"/>
+          <p:cNvSpPr>
+            <a:spLocks noGrp="1"/>
+          </p:cNvSpPr>
+          <p:nvPr>
+            <p:ph type="sldNum" sz="quarter" idx="10"/>
+          </p:nvPr>
+        </p:nvSpPr>
+        <p:spPr/>
+        <p:txBody>
+          <a:bodyPr/>
+          <a:lstStyle/>
+          <a:p>
+            <a:fld id="{F7021451-1387-4CA6-816F-3879F97B5CBC}" type="slidenum">
+              <a:rPr lang="en-US"/>
+              <a:t>27</a:t>
+            </a:fld>
+            <a:endParaRPr lang="en-US"/>
+          </a:p>
+        </p:txBody>
+      </p:sp>
+    </p:spTree>
+    <p:extLst>
+      <p:ext uri="{BB962C8B-B14F-4D97-AF65-F5344CB8AC3E}">
+        <p14:creationId xmlns:p14="http://schemas.microsoft.com/office/powerpoint/2010/main" val="1024086991"/>
+      </p:ext>
+    </p:extLst>
+  </p:cSld>
+  <p:clrMapOvr>
+    <a:masterClrMapping/>
+  </p:clrMapOvr>
+</p:notes>
+</file>
+
+<file path=ppt/notesSlides/notesSlide28.xml><?xml version="1.0" encoding="utf-8"?>
+<p:notes xmlns:a="http://schemas.openxmlformats.org/drawingml/2006/main" xmlns:r="http://schemas.openxmlformats.org/officeDocument/2006/relationships" xmlns:p="http://schemas.openxmlformats.org/presentationml/2006/main">
+  <p:cSld>
+    <p:spTree>
+      <p:nvGrpSpPr>
+        <p:cNvPr id="1" name=""/>
+        <p:cNvGrpSpPr/>
+        <p:nvPr/>
+      </p:nvGrpSpPr>
+      <p:grpSpPr>
+        <a:xfrm>
+          <a:off x="0" y="0"/>
+          <a:ext cx="0" cy="0"/>
+          <a:chOff x="0" y="0"/>
+          <a:chExt cx="0" cy="0"/>
+        </a:xfrm>
+      </p:grpSpPr>
+      <p:sp>
+        <p:nvSpPr>
+          <p:cNvPr id="2" name="Slide Image Placeholder 1"/>
+          <p:cNvSpPr>
+            <a:spLocks noGrp="1" noRot="1" noChangeAspect="1"/>
+          </p:cNvSpPr>
+          <p:nvPr>
+            <p:ph type="sldImg"/>
+          </p:nvPr>
+        </p:nvSpPr>
+        <p:spPr/>
+      </p:sp>
+      <p:sp>
+        <p:nvSpPr>
+          <p:cNvPr id="3" name="Notes Placeholder 2"/>
+          <p:cNvSpPr>
+            <a:spLocks noGrp="1"/>
+          </p:cNvSpPr>
+          <p:nvPr>
+            <p:ph type="body" idx="1"/>
+          </p:nvPr>
+        </p:nvSpPr>
+        <p:spPr/>
+        <p:txBody>
+          <a:bodyPr/>
+          <a:lstStyle/>
+          <a:p>
+            <a:r>
+              <a:rPr lang="en-US" dirty="0"/>
+              <a:t>Your account shows the broker's details and lets them change their password.</a:t>
+            </a:r>
+            <a:endParaRPr lang="en-US" dirty="0"/>
+          </a:p>
+        </p:txBody>
+      </p:sp>
+      <p:sp>
+        <p:nvSpPr>
+          <p:cNvPr id="4" name="Slide Number Placeholder 3"/>
+          <p:cNvSpPr>
+            <a:spLocks noGrp="1"/>
+          </p:cNvSpPr>
+          <p:nvPr>
+            <p:ph type="sldNum" sz="quarter" idx="10"/>
+          </p:nvPr>
+        </p:nvSpPr>
+        <p:spPr/>
+        <p:txBody>
+          <a:bodyPr/>
+          <a:lstStyle/>
+          <a:p>
+            <a:fld id="{F7021451-1387-4CA6-816F-3879F97B5CBC}" type="slidenum">
+              <a:rPr lang="en-US"/>
+              <a:t>28</a:t>
+            </a:fld>
+            <a:endParaRPr lang="en-US"/>
+          </a:p>
+        </p:txBody>
+      </p:sp>
+    </p:spTree>
+    <p:extLst>
+      <p:ext uri="{BB962C8B-B14F-4D97-AF65-F5344CB8AC3E}">
+        <p14:creationId xmlns:p14="http://schemas.microsoft.com/office/powerpoint/2010/main" val="1024086991"/>
+      </p:ext>
+    </p:extLst>
+  </p:cSld>
+  <p:clrMapOvr>
+    <a:masterClrMapping/>
+  </p:clrMapOvr>
+</p:notes>
+</file>
+
+<file path=ppt/notesSlides/notesSlide29.xml><?xml version="1.0" encoding="utf-8"?>
+<p:notes xmlns:a="http://schemas.openxmlformats.org/drawingml/2006/main" xmlns:r="http://schemas.openxmlformats.org/officeDocument/2006/relationships" xmlns:p="http://schemas.openxmlformats.org/presentationml/2006/main">
+  <p:cSld>
+    <p:spTree>
+      <p:nvGrpSpPr>
+        <p:cNvPr id="1" name=""/>
+        <p:cNvGrpSpPr/>
+        <p:nvPr/>
+      </p:nvGrpSpPr>
+      <p:grpSpPr>
+        <a:xfrm>
+          <a:off x="0" y="0"/>
+          <a:ext cx="0" cy="0"/>
+          <a:chOff x="0" y="0"/>
+          <a:chExt cx="0" cy="0"/>
+        </a:xfrm>
+      </p:grpSpPr>
+      <p:sp>
+        <p:nvSpPr>
+          <p:cNvPr id="2" name="Slide Image Placeholder 1"/>
+          <p:cNvSpPr>
+            <a:spLocks noGrp="1" noRot="1" noChangeAspect="1"/>
+          </p:cNvSpPr>
+          <p:nvPr>
+            <p:ph type="sldImg"/>
+          </p:nvPr>
+        </p:nvSpPr>
+        <p:spPr/>
+      </p:sp>
+      <p:sp>
+        <p:nvSpPr>
+          <p:cNvPr id="3" name="Notes Placeholder 2"/>
+          <p:cNvSpPr>
+            <a:spLocks noGrp="1"/>
+          </p:cNvSpPr>
+          <p:nvPr>
+            <p:ph type="body" idx="1"/>
+          </p:nvPr>
+        </p:nvSpPr>
+        <p:spPr/>
+        <p:txBody>
+          <a:bodyPr/>
+          <a:lstStyle/>
+          <a:p>
+            <a:r>
+              <a:rPr lang="en-US" dirty="0"/>
+              <a:t>Key points. Brokers request access, Otta approves, and a welcome email sets up the account. Forms can be completed online, or the broker can send their client a secure link. Otta never contacts clients. Everything submitted goes straight to Otta and shows in Applications. Accepted quotes are bound with one instruction, and claims can be followed under Claims.</a:t>
+            </a:r>
+            <a:endParaRPr lang="en-US" dirty="0"/>
+          </a:p>
+        </p:txBody>
+      </p:sp>
+      <p:sp>
+        <p:nvSpPr>
+          <p:cNvPr id="4" name="Slide Number Placeholder 3"/>
+          <p:cNvSpPr>
+            <a:spLocks noGrp="1"/>
+          </p:cNvSpPr>
+          <p:nvPr>
+            <p:ph type="sldNum" sz="quarter" idx="10"/>
+          </p:nvPr>
+        </p:nvSpPr>
+        <p:spPr/>
+        <p:txBody>
+          <a:bodyPr/>
+          <a:lstStyle/>
+          <a:p>
+            <a:fld id="{F7021451-1387-4CA6-816F-3879F97B5CBC}" type="slidenum">
+              <a:rPr lang="en-US"/>
+              <a:t>29</a:t>
             </a:fld>
             <a:endParaRPr lang="en-US"/>
           </a:p>
@@ -2605,7 +3059,7 @@
           <a:p>
             <a:r>
               <a:rPr lang="en-US" dirty="0"/>
-              <a:t>The dashboard greets the broker by name and shows their open quote requests, active policies and renewals due in the next 60 days. Shortcuts take them to the most used forms, and below are their recent quote requests and upcoming renewals.</a:t>
+              <a:t>The dashboard greets the broker by name. The first tile shows their active book with Otta: the total annual premium of their clients' active policies, and just below it the book broken down by product. The other tiles show open quote requests, active policies and renewals due in the next 60 days. Shortcuts take them to the most used forms.</a:t>
             </a:r>
             <a:endParaRPr lang="en-US" dirty="0"/>
           </a:p>
@@ -4497,7 +4951,7 @@
                   <a:schemeClr val="tx1"/>
                 </a:solidFill>
               </a:rPr>
-              <a:t>Send to a client emails them a secure link instead.</a:t>
+              <a:t>Send to a client creates a secure link the broker sends to their client.</a:t>
             </a:r>
             <a:endParaRPr lang="en-US" sz="1200" dirty="0"/>
           </a:p>
@@ -6123,7 +6577,7 @@
                   <a:schemeClr val="tx1"/>
                 </a:solidFill>
               </a:rPr>
-              <a:t>The client's name and email.</a:t>
+              <a:t>The client's name.</a:t>
             </a:r>
             <a:endParaRPr lang="en-US" sz="1350" dirty="0"/>
           </a:p>
@@ -6220,104 +6674,7 @@
                   <a:schemeClr val="tx1"/>
                 </a:solidFill>
               </a:rPr>
-              <a:t>An optional personal note for the email.</a:t>
-            </a:r>
-            <a:endParaRPr lang="en-US" sz="1350" dirty="0"/>
-          </a:p>
-        </p:txBody>
-      </p:sp>
-      <p:sp>
-        <p:nvSpPr>
-          <p:cNvPr id="11" name="Step 3 marker"/>
-          <p:cNvSpPr/>
-          <p:nvPr/>
-        </p:nvSpPr>
-        <p:spPr>
-          <a:xfrm>
-            <a:off x="8503920" y="3584448"/>
-            <a:ext cx="347472" cy="347472"/>
-          </a:xfrm>
-          <a:prstGeom prst="ellipse">
-            <a:avLst/>
-          </a:prstGeom>
-          <a:solidFill>
-            <a:schemeClr val="accent3"/>
-          </a:solidFill>
-          <a:ln w="12700">
-            <a:solidFill>
-              <a:schemeClr val="accent3"/>
-            </a:solidFill>
-            <a:prstDash val="solid"/>
-          </a:ln>
-        </p:spPr>
-      </p:sp>
-      <p:sp>
-        <p:nvSpPr>
-          <p:cNvPr id="12" name="Step 3 number"/>
-          <p:cNvSpPr txBox="1"/>
-          <p:nvPr/>
-        </p:nvSpPr>
-        <p:spPr>
-          <a:xfrm>
-            <a:off x="8503920" y="3584448"/>
-            <a:ext cx="347472" cy="347472"/>
-          </a:xfrm>
-          <a:prstGeom prst="rect">
-            <a:avLst/>
-          </a:prstGeom>
-          <a:noFill/>
-          <a:ln/>
-        </p:spPr>
-        <p:txBody>
-          <a:bodyPr wrap="square" lIns="0" tIns="0" rIns="0" bIns="0" rtlCol="0" anchor="ctr"/>
-          <a:lstStyle/>
-          <a:p>
-            <a:pPr algn="ctr" indent="0" marL="0">
-              <a:buNone/>
-            </a:pPr>
-            <a:r>
-              <a:rPr lang="en-US" sz="1300" b="1" dirty="0">
-                <a:solidFill>
-                  <a:schemeClr val="bg1"/>
-                </a:solidFill>
-              </a:rPr>
-              <a:t>3</a:t>
-            </a:r>
-            <a:endParaRPr lang="en-US" sz="1300" dirty="0"/>
-          </a:p>
-        </p:txBody>
-      </p:sp>
-      <p:sp>
-        <p:nvSpPr>
-          <p:cNvPr id="13" name="Step 3 text"/>
-          <p:cNvSpPr txBox="1"/>
-          <p:nvPr/>
-        </p:nvSpPr>
-        <p:spPr>
-          <a:xfrm>
-            <a:off x="8979408" y="3566160"/>
-            <a:ext cx="2770632" cy="1115568"/>
-          </a:xfrm>
-          <a:prstGeom prst="rect">
-            <a:avLst/>
-          </a:prstGeom>
-          <a:noFill/>
-          <a:ln/>
-        </p:spPr>
-        <p:txBody>
-          <a:bodyPr wrap="square" lIns="0" tIns="0" rIns="0" bIns="0" rtlCol="0" anchor="t"/>
-          <a:lstStyle/>
-          <a:p>
-            <a:pPr indent="0" marL="0">
-              <a:buNone/>
-            </a:pPr>
-            <a:r>
-              <a:rPr lang="en-US" sz="1350" dirty="0">
-                <a:solidFill>
-                  <a:schemeClr val="tx1"/>
-                </a:solidFill>
-              </a:rPr>
-              <a:t>Create link. Otta emails it to the client, or copy it and send it yourself.</a:t>
+              <a:t>Create link, then copy it and send it to the client yourself.</a:t>
             </a:r>
             <a:endParaRPr lang="en-US" sz="1350" dirty="0"/>
           </a:p>
@@ -6578,7 +6935,7 @@
                   <a:schemeClr val="tx1"/>
                 </a:solidFill>
               </a:rPr>
-              <a:t>Applications sent to Otta, by you or your clients.</a:t>
+              <a:t>Applications sent to Otta, by the broker or their clients.</a:t>
             </a:r>
             <a:endParaRPr lang="en-US" sz="1350" dirty="0"/>
           </a:p>
@@ -6675,7 +7032,7 @@
                   <a:schemeClr val="tx1"/>
                 </a:solidFill>
               </a:rPr>
-              <a:t>Links sent to clients, and whether they've been completed.</a:t>
+              <a:t>Links created for clients, and whether they've been completed.</a:t>
             </a:r>
             <a:endParaRPr lang="en-US" sz="1350" dirty="0"/>
           </a:p>
@@ -6772,7 +7129,7 @@
                   <a:schemeClr val="tx1"/>
                 </a:solidFill>
               </a:rPr>
-              <a:t>Send to a client or fill in a new form online.</a:t>
+              <a:t>Create a client link or fill in a new form online.</a:t>
             </a:r>
             <a:endParaRPr lang="en-US" sz="1350" dirty="0"/>
           </a:p>
@@ -6916,7 +7273,7 @@
                   <a:schemeClr val="bg1"/>
                 </a:solidFill>
               </a:rPr>
-              <a:t>Quotes, policies and help</a:t>
+              <a:t>Quotes, policies and claims</a:t>
             </a:r>
             <a:endParaRPr lang="en-US" sz="4000" dirty="0"/>
           </a:p>
@@ -6954,7 +7311,7 @@
                   <a:schemeClr val="bg1"/>
                 </a:solidFill>
               </a:rPr>
-              <a:t>From quote to bound policy, and where to get help.</a:t>
+              <a:t>From quote to bound policy, and following claims.</a:t>
             </a:r>
             <a:endParaRPr lang="en-US" sz="2000" dirty="0"/>
           </a:p>
@@ -8084,7 +8441,7 @@
         <p:spPr>
           <a:xfrm>
             <a:off x="457200" y="1280160"/>
-            <a:ext cx="5486400" cy="2331720"/>
+            <a:ext cx="3566160" cy="2331720"/>
           </a:xfrm>
           <a:prstGeom prst="roundRect">
             <a:avLst>
@@ -8172,7 +8529,7 @@
         <p:spPr>
           <a:xfrm>
             <a:off x="1463040" y="1554480"/>
-            <a:ext cx="4206240" cy="594360"/>
+            <a:ext cx="2286000" cy="594360"/>
           </a:xfrm>
           <a:prstGeom prst="rect">
             <a:avLst/>
@@ -8208,7 +8565,7 @@
         <p:spPr>
           <a:xfrm>
             <a:off x="1463040" y="2194560"/>
-            <a:ext cx="4206240" cy="1188720"/>
+            <a:ext cx="2286000" cy="1188720"/>
           </a:xfrm>
           <a:prstGeom prst="rect">
             <a:avLst/>
@@ -8243,8 +8600,8 @@
         </p:nvSpPr>
         <p:spPr>
           <a:xfrm>
-            <a:off x="6217920" y="1280160"/>
-            <a:ext cx="5486400" cy="2331720"/>
+            <a:off x="4297680" y="1280160"/>
+            <a:ext cx="3566160" cy="2331720"/>
           </a:xfrm>
           <a:prstGeom prst="roundRect">
             <a:avLst>
@@ -8270,7 +8627,7 @@
         </p:nvSpPr>
         <p:spPr>
           <a:xfrm>
-            <a:off x="6537960" y="1600200"/>
+            <a:off x="4617720" y="1600200"/>
             <a:ext cx="502920" cy="502920"/>
           </a:xfrm>
           <a:prstGeom prst="ellipse">
@@ -8295,7 +8652,7 @@
         </p:nvSpPr>
         <p:spPr>
           <a:xfrm>
-            <a:off x="6537960" y="1600200"/>
+            <a:off x="4617720" y="1600200"/>
             <a:ext cx="502920" cy="502920"/>
           </a:xfrm>
           <a:prstGeom prst="rect">
@@ -8331,8 +8688,8 @@
         </p:nvSpPr>
         <p:spPr>
           <a:xfrm>
-            <a:off x="7223760" y="1554480"/>
-            <a:ext cx="4206240" cy="594360"/>
+            <a:off x="5303520" y="1554480"/>
+            <a:ext cx="2286000" cy="594360"/>
           </a:xfrm>
           <a:prstGeom prst="rect">
             <a:avLst/>
@@ -8367,8 +8724,8 @@
         </p:nvSpPr>
         <p:spPr>
           <a:xfrm>
-            <a:off x="7223760" y="2194560"/>
-            <a:ext cx="4206240" cy="1188720"/>
+            <a:off x="5303520" y="2194560"/>
+            <a:ext cx="2286000" cy="1188720"/>
           </a:xfrm>
           <a:prstGeom prst="rect">
             <a:avLst/>
@@ -8403,8 +8760,8 @@
         </p:nvSpPr>
         <p:spPr>
           <a:xfrm>
-            <a:off x="457200" y="3886200"/>
-            <a:ext cx="5486400" cy="2331720"/>
+            <a:off x="8138160" y="1280160"/>
+            <a:ext cx="3566160" cy="2331720"/>
           </a:xfrm>
           <a:prstGeom prst="roundRect">
             <a:avLst>
@@ -8430,7 +8787,7 @@
         </p:nvSpPr>
         <p:spPr>
           <a:xfrm>
-            <a:off x="777240" y="4206240"/>
+            <a:off x="8458200" y="1600200"/>
             <a:ext cx="502920" cy="502920"/>
           </a:xfrm>
           <a:prstGeom prst="ellipse">
@@ -8455,7 +8812,7 @@
         </p:nvSpPr>
         <p:spPr>
           <a:xfrm>
-            <a:off x="777240" y="4206240"/>
+            <a:off x="8458200" y="1600200"/>
             <a:ext cx="502920" cy="502920"/>
           </a:xfrm>
           <a:prstGeom prst="rect">
@@ -8491,8 +8848,8 @@
         </p:nvSpPr>
         <p:spPr>
           <a:xfrm>
-            <a:off x="1463040" y="4160520"/>
-            <a:ext cx="4206240" cy="594360"/>
+            <a:off x="9144000" y="1554480"/>
+            <a:ext cx="2286000" cy="594360"/>
           </a:xfrm>
           <a:prstGeom prst="rect">
             <a:avLst/>
@@ -8527,8 +8884,8 @@
         </p:nvSpPr>
         <p:spPr>
           <a:xfrm>
-            <a:off x="1463040" y="4800600"/>
-            <a:ext cx="4206240" cy="1188720"/>
+            <a:off x="9144000" y="2194560"/>
+            <a:ext cx="2286000" cy="1188720"/>
           </a:xfrm>
           <a:prstGeom prst="rect">
             <a:avLst/>
@@ -8549,7 +8906,7 @@
                   <a:schemeClr val="tx1"/>
                 </a:solidFill>
               </a:rPr>
-              <a:t>Completing forms online, sending them to clients and tracking them.</a:t>
+              <a:t>Completing forms online, creating client links and tracking them.</a:t>
             </a:r>
             <a:endParaRPr lang="en-US" sz="1500" dirty="0"/>
           </a:p>
@@ -8563,8 +8920,8 @@
         </p:nvSpPr>
         <p:spPr>
           <a:xfrm>
-            <a:off x="6217920" y="3886200"/>
-            <a:ext cx="5486400" cy="2331720"/>
+            <a:off x="457200" y="3886200"/>
+            <a:ext cx="3566160" cy="2331720"/>
           </a:xfrm>
           <a:prstGeom prst="roundRect">
             <a:avLst>
@@ -8590,7 +8947,7 @@
         </p:nvSpPr>
         <p:spPr>
           <a:xfrm>
-            <a:off x="6537960" y="4206240"/>
+            <a:off x="777240" y="4206240"/>
             <a:ext cx="502920" cy="502920"/>
           </a:xfrm>
           <a:prstGeom prst="ellipse">
@@ -8615,7 +8972,7 @@
         </p:nvSpPr>
         <p:spPr>
           <a:xfrm>
-            <a:off x="6537960" y="4206240"/>
+            <a:off x="777240" y="4206240"/>
             <a:ext cx="502920" cy="502920"/>
           </a:xfrm>
           <a:prstGeom prst="rect">
@@ -8651,8 +9008,8 @@
         </p:nvSpPr>
         <p:spPr>
           <a:xfrm>
-            <a:off x="7223760" y="4160520"/>
-            <a:ext cx="4206240" cy="594360"/>
+            <a:off x="1463040" y="4160520"/>
+            <a:ext cx="2286000" cy="594360"/>
           </a:xfrm>
           <a:prstGeom prst="rect">
             <a:avLst/>
@@ -8673,7 +9030,7 @@
                   <a:schemeClr val="tx2"/>
                 </a:solidFill>
               </a:rPr>
-              <a:t>Quotes, policies and help</a:t>
+              <a:t>Quotes, policies and claims</a:t>
             </a:r>
             <a:endParaRPr lang="en-US" sz="1900" dirty="0"/>
           </a:p>
@@ -8687,8 +9044,8 @@
         </p:nvSpPr>
         <p:spPr>
           <a:xfrm>
-            <a:off x="7223760" y="4800600"/>
-            <a:ext cx="4206240" cy="1188720"/>
+            <a:off x="1463040" y="4800600"/>
+            <a:ext cx="2286000" cy="1188720"/>
           </a:xfrm>
           <a:prstGeom prst="rect">
             <a:avLst/>
@@ -8709,7 +9066,167 @@
                   <a:schemeClr val="tx1"/>
                 </a:solidFill>
               </a:rPr>
-              <a:t>Binding a quote, policies, documents and account settings.</a:t>
+              <a:t>Binding a quote, policies, claims and documents.</a:t>
+            </a:r>
+            <a:endParaRPr lang="en-US" sz="1500" dirty="0"/>
+          </a:p>
+        </p:txBody>
+      </p:sp>
+      <p:sp>
+        <p:nvSpPr>
+          <p:cNvPr id="23" name="Card 5"/>
+          <p:cNvSpPr/>
+          <p:nvPr/>
+        </p:nvSpPr>
+        <p:spPr>
+          <a:xfrm>
+            <a:off x="4297680" y="3886200"/>
+            <a:ext cx="3566160" cy="2331720"/>
+          </a:xfrm>
+          <a:prstGeom prst="roundRect">
+            <a:avLst>
+              <a:gd name="adj" fmla="val 3137"/>
+            </a:avLst>
+          </a:prstGeom>
+          <a:solidFill>
+            <a:schemeClr val="bg1"/>
+          </a:solidFill>
+          <a:ln w="12700">
+            <a:solidFill>
+              <a:srgbClr val="DDE7E5"/>
+            </a:solidFill>
+            <a:prstDash val="solid"/>
+          </a:ln>
+        </p:spPr>
+      </p:sp>
+      <p:sp>
+        <p:nvSpPr>
+          <p:cNvPr id="24" name="Card 5 marker"/>
+          <p:cNvSpPr/>
+          <p:nvPr/>
+        </p:nvSpPr>
+        <p:spPr>
+          <a:xfrm>
+            <a:off x="4617720" y="4206240"/>
+            <a:ext cx="502920" cy="502920"/>
+          </a:xfrm>
+          <a:prstGeom prst="ellipse">
+            <a:avLst/>
+          </a:prstGeom>
+          <a:solidFill>
+            <a:schemeClr val="accent1"/>
+          </a:solidFill>
+          <a:ln w="12700">
+            <a:solidFill>
+              <a:schemeClr val="accent1"/>
+            </a:solidFill>
+            <a:prstDash val="solid"/>
+          </a:ln>
+        </p:spPr>
+      </p:sp>
+      <p:sp>
+        <p:nvSpPr>
+          <p:cNvPr id="25" name="Card 5 number"/>
+          <p:cNvSpPr txBox="1"/>
+          <p:nvPr/>
+        </p:nvSpPr>
+        <p:spPr>
+          <a:xfrm>
+            <a:off x="4617720" y="4206240"/>
+            <a:ext cx="502920" cy="502920"/>
+          </a:xfrm>
+          <a:prstGeom prst="rect">
+            <a:avLst/>
+          </a:prstGeom>
+          <a:noFill/>
+          <a:ln/>
+        </p:spPr>
+        <p:txBody>
+          <a:bodyPr wrap="square" lIns="0" tIns="0" rIns="0" bIns="0" rtlCol="0" anchor="ctr"/>
+          <a:lstStyle/>
+          <a:p>
+            <a:pPr algn="ctr" indent="0" marL="0">
+              <a:buNone/>
+            </a:pPr>
+            <a:r>
+              <a:rPr lang="en-US" sz="1800" b="1" dirty="0">
+                <a:solidFill>
+                  <a:schemeClr val="bg1"/>
+                </a:solidFill>
+              </a:rPr>
+              <a:t>5</a:t>
+            </a:r>
+            <a:endParaRPr lang="en-US" sz="1800" dirty="0"/>
+          </a:p>
+        </p:txBody>
+      </p:sp>
+      <p:sp>
+        <p:nvSpPr>
+          <p:cNvPr id="26" name="Card 5 heading"/>
+          <p:cNvSpPr txBox="1"/>
+          <p:nvPr/>
+        </p:nvSpPr>
+        <p:spPr>
+          <a:xfrm>
+            <a:off x="5303520" y="4160520"/>
+            <a:ext cx="2286000" cy="594360"/>
+          </a:xfrm>
+          <a:prstGeom prst="rect">
+            <a:avLst/>
+          </a:prstGeom>
+          <a:noFill/>
+          <a:ln/>
+        </p:spPr>
+        <p:txBody>
+          <a:bodyPr wrap="square" lIns="0" tIns="0" rIns="0" bIns="0" rtlCol="0" anchor="ctr"/>
+          <a:lstStyle/>
+          <a:p>
+            <a:pPr indent="0" marL="0">
+              <a:buNone/>
+            </a:pPr>
+            <a:r>
+              <a:rPr lang="en-US" sz="1900" b="1" dirty="0">
+                <a:solidFill>
+                  <a:schemeClr val="tx2"/>
+                </a:solidFill>
+              </a:rPr>
+              <a:t>Wordings, training and help</a:t>
+            </a:r>
+            <a:endParaRPr lang="en-US" sz="1900" dirty="0"/>
+          </a:p>
+        </p:txBody>
+      </p:sp>
+      <p:sp>
+        <p:nvSpPr>
+          <p:cNvPr id="27" name="Card 5 text"/>
+          <p:cNvSpPr txBox="1"/>
+          <p:nvPr/>
+        </p:nvSpPr>
+        <p:spPr>
+          <a:xfrm>
+            <a:off x="5303520" y="4800600"/>
+            <a:ext cx="2286000" cy="1188720"/>
+          </a:xfrm>
+          <a:prstGeom prst="rect">
+            <a:avLst/>
+          </a:prstGeom>
+          <a:noFill/>
+          <a:ln/>
+        </p:spPr>
+        <p:txBody>
+          <a:bodyPr wrap="square" lIns="0" tIns="0" rIns="0" bIns="0" rtlCol="0" anchor="t"/>
+          <a:lstStyle/>
+          <a:p>
+            <a:pPr indent="0" marL="0">
+              <a:buNone/>
+            </a:pPr>
+            <a:r>
+              <a:rPr lang="en-US" sz="1500" dirty="0">
+                <a:solidFill>
+                  <a:schemeClr val="tx1"/>
+                </a:solidFill>
+              </a:rPr>
+              <a:t>Policy wordings, the training walkthrough and account settings.</a:t>
             </a:r>
             <a:endParaRPr lang="en-US" sz="1500" dirty="0"/>
           </a:p>
@@ -9175,7 +9692,7 @@
                   <a:schemeClr val="tx2"/>
                 </a:solidFill>
               </a:rPr>
-              <a:t>Documents</a:t>
+              <a:t>Claims</a:t>
             </a:r>
             <a:endParaRPr lang="en-US" sz="2800" dirty="0"/>
           </a:p>
@@ -9215,7 +9732,7 @@
       </p:sp>
       <p:pic>
         <p:nvPicPr>
-          <p:cNvPr id="4" name="Screenshot" descr="Documents: screenshot with numbered callouts">    </p:cNvPr>
+          <p:cNvPr id="4" name="Screenshot" descr="Claims: screenshot with numbered callouts">    </p:cNvPr>
           <p:cNvPicPr>
             <a:picLocks noChangeAspect="1"/>
           </p:cNvPicPr>
@@ -9328,7 +9845,7 @@
                   <a:schemeClr val="tx1"/>
                 </a:solidFill>
               </a:rPr>
-              <a:t>Policy documents for the brokerage.</a:t>
+              <a:t>Open claims, claims this year and what has been paid.</a:t>
             </a:r>
             <a:endParaRPr lang="en-US" sz="1350" dirty="0"/>
           </a:p>
@@ -9425,7 +9942,104 @@
                   <a:schemeClr val="tx1"/>
                 </a:solidFill>
               </a:rPr>
-              <a:t>Download any document.</a:t>
+              <a:t>Each claim and where it is up to. Select one for the detail.</a:t>
+            </a:r>
+            <a:endParaRPr lang="en-US" sz="1350" dirty="0"/>
+          </a:p>
+        </p:txBody>
+      </p:sp>
+      <p:sp>
+        <p:nvSpPr>
+          <p:cNvPr id="11" name="Step 3 marker"/>
+          <p:cNvSpPr/>
+          <p:nvPr/>
+        </p:nvSpPr>
+        <p:spPr>
+          <a:xfrm>
+            <a:off x="8503920" y="3584448"/>
+            <a:ext cx="347472" cy="347472"/>
+          </a:xfrm>
+          <a:prstGeom prst="ellipse">
+            <a:avLst/>
+          </a:prstGeom>
+          <a:solidFill>
+            <a:schemeClr val="accent3"/>
+          </a:solidFill>
+          <a:ln w="12700">
+            <a:solidFill>
+              <a:schemeClr val="accent3"/>
+            </a:solidFill>
+            <a:prstDash val="solid"/>
+          </a:ln>
+        </p:spPr>
+      </p:sp>
+      <p:sp>
+        <p:nvSpPr>
+          <p:cNvPr id="12" name="Step 3 number"/>
+          <p:cNvSpPr txBox="1"/>
+          <p:nvPr/>
+        </p:nvSpPr>
+        <p:spPr>
+          <a:xfrm>
+            <a:off x="8503920" y="3584448"/>
+            <a:ext cx="347472" cy="347472"/>
+          </a:xfrm>
+          <a:prstGeom prst="rect">
+            <a:avLst/>
+          </a:prstGeom>
+          <a:noFill/>
+          <a:ln/>
+        </p:spPr>
+        <p:txBody>
+          <a:bodyPr wrap="square" lIns="0" tIns="0" rIns="0" bIns="0" rtlCol="0" anchor="ctr"/>
+          <a:lstStyle/>
+          <a:p>
+            <a:pPr algn="ctr" indent="0" marL="0">
+              <a:buNone/>
+            </a:pPr>
+            <a:r>
+              <a:rPr lang="en-US" sz="1300" b="1" dirty="0">
+                <a:solidFill>
+                  <a:schemeClr val="bg1"/>
+                </a:solidFill>
+              </a:rPr>
+              <a:t>3</a:t>
+            </a:r>
+            <a:endParaRPr lang="en-US" sz="1300" dirty="0"/>
+          </a:p>
+        </p:txBody>
+      </p:sp>
+      <p:sp>
+        <p:nvSpPr>
+          <p:cNvPr id="13" name="Step 3 text"/>
+          <p:cNvSpPr txBox="1"/>
+          <p:nvPr/>
+        </p:nvSpPr>
+        <p:spPr>
+          <a:xfrm>
+            <a:off x="8979408" y="3566160"/>
+            <a:ext cx="2770632" cy="1115568"/>
+          </a:xfrm>
+          <a:prstGeom prst="rect">
+            <a:avLst/>
+          </a:prstGeom>
+          <a:noFill/>
+          <a:ln/>
+        </p:spPr>
+        <p:txBody>
+          <a:bodyPr wrap="square" lIns="0" tIns="0" rIns="0" bIns="0" rtlCol="0" anchor="t"/>
+          <a:lstStyle/>
+          <a:p>
+            <a:pPr indent="0" marL="0">
+              <a:buNone/>
+            </a:pPr>
+            <a:r>
+              <a:rPr lang="en-US" sz="1350" dirty="0">
+                <a:solidFill>
+                  <a:schemeClr val="tx1"/>
+                </a:solidFill>
+              </a:rPr>
+              <a:t>Lodge a claim takes the broker to the claim forms.</a:t>
             </a:r>
             <a:endParaRPr lang="en-US" sz="1350" dirty="0"/>
           </a:p>
@@ -9533,7 +10147,7 @@
                   <a:schemeClr val="tx2"/>
                 </a:solidFill>
               </a:rPr>
-              <a:t>Help and contact</a:t>
+              <a:t>A claim's progress</a:t>
             </a:r>
             <a:endParaRPr lang="en-US" sz="2800" dirty="0"/>
           </a:p>
@@ -9573,7 +10187,7 @@
       </p:sp>
       <p:pic>
         <p:nvPicPr>
-          <p:cNvPr id="4" name="Screenshot" descr="Help and contact: screenshot with numbered callouts">    </p:cNvPr>
+          <p:cNvPr id="4" name="Screenshot" descr="A claim's progress: screenshot with numbered callouts">    </p:cNvPr>
           <p:cNvPicPr>
             <a:picLocks noChangeAspect="1"/>
           </p:cNvPicPr>
@@ -9686,7 +10300,7 @@
                   <a:schemeClr val="tx1"/>
                 </a:solidFill>
               </a:rPr>
-              <a:t>Email the right underwriting team directly.</a:t>
+              <a:t>The insured, claim number and status.</a:t>
             </a:r>
             <a:endParaRPr lang="en-US" sz="1350" dirty="0"/>
           </a:p>
@@ -9783,7 +10397,104 @@
                   <a:schemeClr val="tx1"/>
                 </a:solidFill>
               </a:rPr>
-              <a:t>How colleagues get access, and how to reset a password.</a:t>
+              <a:t>The claim details: policy, dates, amounts and what happened.</a:t>
+            </a:r>
+            <a:endParaRPr lang="en-US" sz="1350" dirty="0"/>
+          </a:p>
+        </p:txBody>
+      </p:sp>
+      <p:sp>
+        <p:nvSpPr>
+          <p:cNvPr id="11" name="Step 3 marker"/>
+          <p:cNvSpPr/>
+          <p:nvPr/>
+        </p:nvSpPr>
+        <p:spPr>
+          <a:xfrm>
+            <a:off x="8503920" y="3584448"/>
+            <a:ext cx="347472" cy="347472"/>
+          </a:xfrm>
+          <a:prstGeom prst="ellipse">
+            <a:avLst/>
+          </a:prstGeom>
+          <a:solidFill>
+            <a:schemeClr val="accent3"/>
+          </a:solidFill>
+          <a:ln w="12700">
+            <a:solidFill>
+              <a:schemeClr val="accent3"/>
+            </a:solidFill>
+            <a:prstDash val="solid"/>
+          </a:ln>
+        </p:spPr>
+      </p:sp>
+      <p:sp>
+        <p:nvSpPr>
+          <p:cNvPr id="12" name="Step 3 number"/>
+          <p:cNvSpPr txBox="1"/>
+          <p:nvPr/>
+        </p:nvSpPr>
+        <p:spPr>
+          <a:xfrm>
+            <a:off x="8503920" y="3584448"/>
+            <a:ext cx="347472" cy="347472"/>
+          </a:xfrm>
+          <a:prstGeom prst="rect">
+            <a:avLst/>
+          </a:prstGeom>
+          <a:noFill/>
+          <a:ln/>
+        </p:spPr>
+        <p:txBody>
+          <a:bodyPr wrap="square" lIns="0" tIns="0" rIns="0" bIns="0" rtlCol="0" anchor="ctr"/>
+          <a:lstStyle/>
+          <a:p>
+            <a:pPr algn="ctr" indent="0" marL="0">
+              <a:buNone/>
+            </a:pPr>
+            <a:r>
+              <a:rPr lang="en-US" sz="1300" b="1" dirty="0">
+                <a:solidFill>
+                  <a:schemeClr val="bg1"/>
+                </a:solidFill>
+              </a:rPr>
+              <a:t>3</a:t>
+            </a:r>
+            <a:endParaRPr lang="en-US" sz="1300" dirty="0"/>
+          </a:p>
+        </p:txBody>
+      </p:sp>
+      <p:sp>
+        <p:nvSpPr>
+          <p:cNvPr id="13" name="Step 3 text"/>
+          <p:cNvSpPr txBox="1"/>
+          <p:nvPr/>
+        </p:nvSpPr>
+        <p:spPr>
+          <a:xfrm>
+            <a:off x="8979408" y="3566160"/>
+            <a:ext cx="2770632" cy="1115568"/>
+          </a:xfrm>
+          <a:prstGeom prst="rect">
+            <a:avLst/>
+          </a:prstGeom>
+          <a:noFill/>
+          <a:ln/>
+        </p:spPr>
+        <p:txBody>
+          <a:bodyPr wrap="square" lIns="0" tIns="0" rIns="0" bIns="0" rtlCol="0" anchor="t"/>
+          <a:lstStyle/>
+          <a:p>
+            <a:pPr indent="0" marL="0">
+              <a:buNone/>
+            </a:pPr>
+            <a:r>
+              <a:rPr lang="en-US" sz="1350" dirty="0">
+                <a:solidFill>
+                  <a:schemeClr val="tx1"/>
+                </a:solidFill>
+              </a:rPr>
+              <a:t>Progress, step by step.</a:t>
             </a:r>
             <a:endParaRPr lang="en-US" sz="1350" dirty="0"/>
           </a:p>
@@ -9891,7 +10602,7 @@
                   <a:schemeClr val="tx2"/>
                 </a:solidFill>
               </a:rPr>
-              <a:t>Your account</a:t>
+              <a:t>Documents</a:t>
             </a:r>
             <a:endParaRPr lang="en-US" sz="2800" dirty="0"/>
           </a:p>
@@ -9931,7 +10642,7 @@
       </p:sp>
       <p:pic>
         <p:nvPicPr>
-          <p:cNvPr id="4" name="Screenshot" descr="Your account: screenshot with numbered callouts">    </p:cNvPr>
+          <p:cNvPr id="4" name="Screenshot" descr="Documents: screenshot with numbered callouts">    </p:cNvPr>
           <p:cNvPicPr>
             <a:picLocks noChangeAspect="1"/>
           </p:cNvPicPr>
@@ -10044,7 +10755,7 @@
                   <a:schemeClr val="tx1"/>
                 </a:solidFill>
               </a:rPr>
-              <a:t>Your details.</a:t>
+              <a:t>Policy documents for the brokerage.</a:t>
             </a:r>
             <a:endParaRPr lang="en-US" sz="1350" dirty="0"/>
           </a:p>
@@ -10141,104 +10852,7 @@
                   <a:schemeClr val="tx1"/>
                 </a:solidFill>
               </a:rPr>
-              <a:t>Choose a new password.</a:t>
-            </a:r>
-            <a:endParaRPr lang="en-US" sz="1350" dirty="0"/>
-          </a:p>
-        </p:txBody>
-      </p:sp>
-      <p:sp>
-        <p:nvSpPr>
-          <p:cNvPr id="11" name="Step 3 marker"/>
-          <p:cNvSpPr/>
-          <p:nvPr/>
-        </p:nvSpPr>
-        <p:spPr>
-          <a:xfrm>
-            <a:off x="8503920" y="3584448"/>
-            <a:ext cx="347472" cy="347472"/>
-          </a:xfrm>
-          <a:prstGeom prst="ellipse">
-            <a:avLst/>
-          </a:prstGeom>
-          <a:solidFill>
-            <a:schemeClr val="accent3"/>
-          </a:solidFill>
-          <a:ln w="12700">
-            <a:solidFill>
-              <a:schemeClr val="accent3"/>
-            </a:solidFill>
-            <a:prstDash val="solid"/>
-          </a:ln>
-        </p:spPr>
-      </p:sp>
-      <p:sp>
-        <p:nvSpPr>
-          <p:cNvPr id="12" name="Step 3 number"/>
-          <p:cNvSpPr txBox="1"/>
-          <p:nvPr/>
-        </p:nvSpPr>
-        <p:spPr>
-          <a:xfrm>
-            <a:off x="8503920" y="3584448"/>
-            <a:ext cx="347472" cy="347472"/>
-          </a:xfrm>
-          <a:prstGeom prst="rect">
-            <a:avLst/>
-          </a:prstGeom>
-          <a:noFill/>
-          <a:ln/>
-        </p:spPr>
-        <p:txBody>
-          <a:bodyPr wrap="square" lIns="0" tIns="0" rIns="0" bIns="0" rtlCol="0" anchor="ctr"/>
-          <a:lstStyle/>
-          <a:p>
-            <a:pPr algn="ctr" indent="0" marL="0">
-              <a:buNone/>
-            </a:pPr>
-            <a:r>
-              <a:rPr lang="en-US" sz="1300" b="1" dirty="0">
-                <a:solidFill>
-                  <a:schemeClr val="bg1"/>
-                </a:solidFill>
-              </a:rPr>
-              <a:t>3</a:t>
-            </a:r>
-            <a:endParaRPr lang="en-US" sz="1300" dirty="0"/>
-          </a:p>
-        </p:txBody>
-      </p:sp>
-      <p:sp>
-        <p:nvSpPr>
-          <p:cNvPr id="13" name="Step 3 text"/>
-          <p:cNvSpPr txBox="1"/>
-          <p:nvPr/>
-        </p:nvSpPr>
-        <p:spPr>
-          <a:xfrm>
-            <a:off x="8979408" y="3566160"/>
-            <a:ext cx="2770632" cy="1115568"/>
-          </a:xfrm>
-          <a:prstGeom prst="rect">
-            <a:avLst/>
-          </a:prstGeom>
-          <a:noFill/>
-          <a:ln/>
-        </p:spPr>
-        <p:txBody>
-          <a:bodyPr wrap="square" lIns="0" tIns="0" rIns="0" bIns="0" rtlCol="0" anchor="t"/>
-          <a:lstStyle/>
-          <a:p>
-            <a:pPr indent="0" marL="0">
-              <a:buNone/>
-            </a:pPr>
-            <a:r>
-              <a:rPr lang="en-US" sz="1350" dirty="0">
-                <a:solidFill>
-                  <a:schemeClr val="tx1"/>
-                </a:solidFill>
-              </a:rPr>
-              <a:t>Save new password.</a:t>
+              <a:t>Download any document.</a:t>
             </a:r>
             <a:endParaRPr lang="en-US" sz="1350" dirty="0"/>
           </a:p>
@@ -10316,6 +10930,1911 @@
       </p:grpSpPr>
       <p:sp>
         <p:nvSpPr>
+          <p:cNvPr id="2" name="Section number"/>
+          <p:cNvSpPr txBox="1"/>
+          <p:nvPr/>
+        </p:nvSpPr>
+        <p:spPr>
+          <a:xfrm>
+            <a:off x="731520" y="1463040"/>
+            <a:ext cx="1828800" cy="1097280"/>
+          </a:xfrm>
+          <a:prstGeom prst="rect">
+            <a:avLst/>
+          </a:prstGeom>
+          <a:noFill/>
+          <a:ln/>
+        </p:spPr>
+        <p:txBody>
+          <a:bodyPr wrap="square" lIns="0" tIns="0" rIns="0" bIns="0" rtlCol="0" anchor="ctr"/>
+          <a:lstStyle/>
+          <a:p>
+            <a:pPr indent="0" marL="0">
+              <a:buNone/>
+            </a:pPr>
+            <a:r>
+              <a:rPr lang="en-US" sz="6600" b="1" dirty="0">
+                <a:solidFill>
+                  <a:schemeClr val="accent2"/>
+                </a:solidFill>
+              </a:rPr>
+              <a:t>05</a:t>
+            </a:r>
+            <a:endParaRPr lang="en-US" sz="6600" dirty="0"/>
+          </a:p>
+        </p:txBody>
+      </p:sp>
+      <p:sp>
+        <p:nvSpPr>
+          <p:cNvPr id="3" name="Text 0"/>
+          <p:cNvSpPr/>
+          <p:nvPr>
+            <p:ph idx="101" type="title" hasCustomPrompt="1"/>
+          </p:nvPr>
+        </p:nvSpPr>
+        <p:spPr>
+          <a:xfrm>
+            <a:off x="731520" y="2743200"/>
+            <a:ext cx="10058400" cy="1005840"/>
+          </a:xfrm>
+          <a:prstGeom prst="rect">
+            <a:avLst/>
+          </a:prstGeom>
+          <a:noFill/>
+          <a:ln/>
+        </p:spPr>
+        <p:txBody>
+          <a:bodyPr wrap="square" lIns="0" tIns="0" rIns="0" bIns="0" rtlCol="0" anchor="t"/>
+          <a:lstStyle/>
+          <a:p>
+            <a:pPr algn="l" indent="0" marL="0">
+              <a:buNone/>
+            </a:pPr>
+            <a:r>
+              <a:rPr lang="en-US" sz="4000" b="1" dirty="0">
+                <a:solidFill>
+                  <a:schemeClr val="bg1"/>
+                </a:solidFill>
+              </a:rPr>
+              <a:t>Wordings, training and help</a:t>
+            </a:r>
+            <a:endParaRPr lang="en-US" sz="4000" dirty="0"/>
+          </a:p>
+        </p:txBody>
+      </p:sp>
+      <p:sp>
+        <p:nvSpPr>
+          <p:cNvPr id="4" name="Text 0"/>
+          <p:cNvSpPr/>
+          <p:nvPr>
+            <p:ph idx="102" type="body" hasCustomPrompt="1"/>
+          </p:nvPr>
+        </p:nvSpPr>
+        <p:spPr>
+          <a:xfrm>
+            <a:off x="731520" y="3794760"/>
+            <a:ext cx="8686800" cy="1097280"/>
+          </a:xfrm>
+          <a:prstGeom prst="rect">
+            <a:avLst/>
+          </a:prstGeom>
+          <a:noFill/>
+          <a:ln/>
+        </p:spPr>
+        <p:txBody>
+          <a:bodyPr wrap="square" lIns="0" tIns="0" rIns="0" bIns="0" rtlCol="0" anchor="t"/>
+          <a:lstStyle/>
+          <a:p>
+            <a:pPr algn="l" indent="0" marL="0">
+              <a:buNone/>
+            </a:pPr>
+            <a:r>
+              <a:rPr lang="en-US" sz="2000" dirty="0">
+                <a:solidFill>
+                  <a:schemeClr val="bg1"/>
+                </a:solidFill>
+              </a:rPr>
+              <a:t>Policy wordings, training and support.</a:t>
+            </a:r>
+            <a:endParaRPr lang="en-US" sz="2000" dirty="0"/>
+          </a:p>
+        </p:txBody>
+      </p:sp>
+      <p:sp>
+        <p:nvSpPr>
+          <p:cNvPr id="25" name="Slide Number Placeholder 0"/>
+          <p:cNvSpPr>
+            <a:spLocks noGrp="1"/>
+          </p:cNvSpPr>
+          <p:nvPr>
+            <p:ph type="sldNum" sz="quarter" idx="4294967295"/>
+          </p:nvPr>
+        </p:nvSpPr>
+        <p:spPr>
+          <a:xfrm>
+            <a:off x="11155680" y="6263640"/>
+            <a:ext cx="548640" cy="274320"/>
+          </a:xfrm>
+          <a:prstGeom prst="rect">
+            <a:avLst/>
+          </a:prstGeom>
+          <a:extLst>
+            <a:ext uri="{C572A759-6A51-4108-AA02-DFA0A04FC94B}">
+              <ma14:wrappingTextBoxFlag xmlns:ma14="http://schemas.microsoft.com/office/mac/drawingml/2011/main" val="0"/>
+            </a:ext>
+          </a:extLst>
+        </p:spPr>
+        <p:txBody>
+          <a:bodyPr/>
+          <a:lstStyle>
+            <a:lvl1pPr>
+              <a:defRPr sz="1000">
+                <a:solidFill>
+                  <a:srgbClr val="FFFFFF"/>
+                </a:solidFill>
+              </a:defRPr>
+            </a:lvl1pPr>
+          </a:lstStyle>
+          <a:p>
+            <a:pPr algn="r"/>
+            <a:fld id="{F7021451-1387-4CA6-816F-3879F97B5CBC}" type="slidenum">
+              <a:rPr b="0" lang="en-US"/>
+              <a:t>24</a:t>
+            </a:fld>
+            <a:endParaRPr lang="en-US"/>
+          </a:p>
+        </p:txBody>
+      </p:sp>
+    </p:spTree>
+  </p:cSld>
+  <p:clrMapOvr>
+    <a:masterClrMapping/>
+  </p:clrMapOvr>
+</p:sld>
+</file>
+
+<file path=ppt/slides/slide25.xml><?xml version="1.0" encoding="utf-8"?>
+<p:sld xmlns:a="http://schemas.openxmlformats.org/drawingml/2006/main" xmlns:r="http://schemas.openxmlformats.org/officeDocument/2006/relationships" xmlns:p="http://schemas.openxmlformats.org/presentationml/2006/main">
+  <p:cSld name="Slide 25">
+    <p:spTree>
+      <p:nvGrpSpPr>
+        <p:cNvPr id="1" name=""/>
+        <p:cNvGrpSpPr/>
+        <p:nvPr/>
+      </p:nvGrpSpPr>
+      <p:grpSpPr>
+        <a:xfrm>
+          <a:off x="0" y="0"/>
+          <a:ext cx="0" cy="0"/>
+          <a:chOff x="0" y="0"/>
+          <a:chExt cx="0" cy="0"/>
+        </a:xfrm>
+      </p:grpSpPr>
+      <p:sp>
+        <p:nvSpPr>
+          <p:cNvPr id="2" name="Text 0"/>
+          <p:cNvSpPr/>
+          <p:nvPr>
+            <p:ph idx="101" type="title" hasCustomPrompt="1"/>
+          </p:nvPr>
+        </p:nvSpPr>
+        <p:spPr>
+          <a:xfrm>
+            <a:off x="457200" y="274320"/>
+            <a:ext cx="10058400" cy="685800"/>
+          </a:xfrm>
+          <a:prstGeom prst="rect">
+            <a:avLst/>
+          </a:prstGeom>
+          <a:noFill/>
+          <a:ln/>
+        </p:spPr>
+        <p:txBody>
+          <a:bodyPr wrap="square" lIns="0" tIns="0" rIns="0" bIns="0" rtlCol="0" anchor="ctr"/>
+          <a:lstStyle/>
+          <a:p>
+            <a:pPr algn="l" indent="0" marL="0">
+              <a:buNone/>
+            </a:pPr>
+            <a:r>
+              <a:rPr lang="en-US" sz="2800" b="1" dirty="0">
+                <a:solidFill>
+                  <a:schemeClr val="tx2"/>
+                </a:solidFill>
+              </a:rPr>
+              <a:t>Policy wordings</a:t>
+            </a:r>
+            <a:endParaRPr lang="en-US" sz="2800" dirty="0"/>
+          </a:p>
+        </p:txBody>
+      </p:sp>
+      <p:sp>
+        <p:nvSpPr>
+          <p:cNvPr id="3" name="Screenshot frame"/>
+          <p:cNvSpPr/>
+          <p:nvPr/>
+        </p:nvSpPr>
+        <p:spPr>
+          <a:xfrm>
+            <a:off x="402336" y="1133856"/>
+            <a:ext cx="7790688" cy="4910328"/>
+          </a:xfrm>
+          <a:prstGeom prst="rect">
+            <a:avLst/>
+          </a:prstGeom>
+          <a:solidFill>
+            <a:schemeClr val="bg1"/>
+          </a:solidFill>
+          <a:ln w="12700">
+            <a:solidFill>
+              <a:srgbClr val="D5DFDD"/>
+            </a:solidFill>
+            <a:prstDash val="solid"/>
+          </a:ln>
+          <a:effectLst>
+            <a:outerShdw sx="100000" sy="100000" kx="0" ky="0" algn="bl" rotWithShape="0" blurRad="76200" dist="25400" dir="5400000">
+              <a:srgbClr val="000000">
+                <a:alpha val="12000"/>
+              </a:srgbClr>
+            </a:outerShdw>
+          </a:effectLst>
+        </p:spPr>
+      </p:sp>
+      <p:pic>
+        <p:nvPicPr>
+          <p:cNvPr id="4" name="Screenshot" descr="Policy wordings: screenshot with numbered callouts">    </p:cNvPr>
+          <p:cNvPicPr>
+            <a:picLocks noChangeAspect="1"/>
+          </p:cNvPicPr>
+          <p:nvPr/>
+        </p:nvPicPr>
+        <p:blipFill>
+          <a:blip r:embed="rId1"/>
+          <a:stretch>
+            <a:fillRect/>
+          </a:stretch>
+        </p:blipFill>
+        <p:spPr>
+          <a:xfrm>
+            <a:off x="457200" y="1188720"/>
+            <a:ext cx="7680960" cy="4800600"/>
+          </a:xfrm>
+          <a:prstGeom prst="rect">
+            <a:avLst/>
+          </a:prstGeom>
+        </p:spPr>
+      </p:pic>
+      <p:sp>
+        <p:nvSpPr>
+          <p:cNvPr id="5" name="Step 1 marker"/>
+          <p:cNvSpPr/>
+          <p:nvPr/>
+        </p:nvSpPr>
+        <p:spPr>
+          <a:xfrm>
+            <a:off x="8503920" y="1207008"/>
+            <a:ext cx="347472" cy="347472"/>
+          </a:xfrm>
+          <a:prstGeom prst="ellipse">
+            <a:avLst/>
+          </a:prstGeom>
+          <a:solidFill>
+            <a:schemeClr val="accent3"/>
+          </a:solidFill>
+          <a:ln w="12700">
+            <a:solidFill>
+              <a:schemeClr val="accent3"/>
+            </a:solidFill>
+            <a:prstDash val="solid"/>
+          </a:ln>
+        </p:spPr>
+      </p:sp>
+      <p:sp>
+        <p:nvSpPr>
+          <p:cNvPr id="6" name="Step 1 number"/>
+          <p:cNvSpPr txBox="1"/>
+          <p:nvPr/>
+        </p:nvSpPr>
+        <p:spPr>
+          <a:xfrm>
+            <a:off x="8503920" y="1207008"/>
+            <a:ext cx="347472" cy="347472"/>
+          </a:xfrm>
+          <a:prstGeom prst="rect">
+            <a:avLst/>
+          </a:prstGeom>
+          <a:noFill/>
+          <a:ln/>
+        </p:spPr>
+        <p:txBody>
+          <a:bodyPr wrap="square" lIns="0" tIns="0" rIns="0" bIns="0" rtlCol="0" anchor="ctr"/>
+          <a:lstStyle/>
+          <a:p>
+            <a:pPr algn="ctr" indent="0" marL="0">
+              <a:buNone/>
+            </a:pPr>
+            <a:r>
+              <a:rPr lang="en-US" sz="1300" b="1" dirty="0">
+                <a:solidFill>
+                  <a:schemeClr val="bg1"/>
+                </a:solidFill>
+              </a:rPr>
+              <a:t>1</a:t>
+            </a:r>
+            <a:endParaRPr lang="en-US" sz="1300" dirty="0"/>
+          </a:p>
+        </p:txBody>
+      </p:sp>
+      <p:sp>
+        <p:nvSpPr>
+          <p:cNvPr id="7" name="Step 1 text"/>
+          <p:cNvSpPr txBox="1"/>
+          <p:nvPr/>
+        </p:nvSpPr>
+        <p:spPr>
+          <a:xfrm>
+            <a:off x="8979408" y="1188720"/>
+            <a:ext cx="2770632" cy="1115568"/>
+          </a:xfrm>
+          <a:prstGeom prst="rect">
+            <a:avLst/>
+          </a:prstGeom>
+          <a:noFill/>
+          <a:ln/>
+        </p:spPr>
+        <p:txBody>
+          <a:bodyPr wrap="square" lIns="0" tIns="0" rIns="0" bIns="0" rtlCol="0" anchor="t"/>
+          <a:lstStyle/>
+          <a:p>
+            <a:pPr indent="0" marL="0">
+              <a:buNone/>
+            </a:pPr>
+            <a:r>
+              <a:rPr lang="en-US" sz="1350" dirty="0">
+                <a:solidFill>
+                  <a:schemeClr val="tx1"/>
+                </a:solidFill>
+              </a:rPr>
+              <a:t>Wordings grouped by product.</a:t>
+            </a:r>
+            <a:endParaRPr lang="en-US" sz="1350" dirty="0"/>
+          </a:p>
+        </p:txBody>
+      </p:sp>
+      <p:sp>
+        <p:nvSpPr>
+          <p:cNvPr id="8" name="Step 2 marker"/>
+          <p:cNvSpPr/>
+          <p:nvPr/>
+        </p:nvSpPr>
+        <p:spPr>
+          <a:xfrm>
+            <a:off x="8503920" y="2395728"/>
+            <a:ext cx="347472" cy="347472"/>
+          </a:xfrm>
+          <a:prstGeom prst="ellipse">
+            <a:avLst/>
+          </a:prstGeom>
+          <a:solidFill>
+            <a:schemeClr val="accent3"/>
+          </a:solidFill>
+          <a:ln w="12700">
+            <a:solidFill>
+              <a:schemeClr val="accent3"/>
+            </a:solidFill>
+            <a:prstDash val="solid"/>
+          </a:ln>
+        </p:spPr>
+      </p:sp>
+      <p:sp>
+        <p:nvSpPr>
+          <p:cNvPr id="9" name="Step 2 number"/>
+          <p:cNvSpPr txBox="1"/>
+          <p:nvPr/>
+        </p:nvSpPr>
+        <p:spPr>
+          <a:xfrm>
+            <a:off x="8503920" y="2395728"/>
+            <a:ext cx="347472" cy="347472"/>
+          </a:xfrm>
+          <a:prstGeom prst="rect">
+            <a:avLst/>
+          </a:prstGeom>
+          <a:noFill/>
+          <a:ln/>
+        </p:spPr>
+        <p:txBody>
+          <a:bodyPr wrap="square" lIns="0" tIns="0" rIns="0" bIns="0" rtlCol="0" anchor="ctr"/>
+          <a:lstStyle/>
+          <a:p>
+            <a:pPr algn="ctr" indent="0" marL="0">
+              <a:buNone/>
+            </a:pPr>
+            <a:r>
+              <a:rPr lang="en-US" sz="1300" b="1" dirty="0">
+                <a:solidFill>
+                  <a:schemeClr val="bg1"/>
+                </a:solidFill>
+              </a:rPr>
+              <a:t>2</a:t>
+            </a:r>
+            <a:endParaRPr lang="en-US" sz="1300" dirty="0"/>
+          </a:p>
+        </p:txBody>
+      </p:sp>
+      <p:sp>
+        <p:nvSpPr>
+          <p:cNvPr id="10" name="Step 2 text"/>
+          <p:cNvSpPr txBox="1"/>
+          <p:nvPr/>
+        </p:nvSpPr>
+        <p:spPr>
+          <a:xfrm>
+            <a:off x="8979408" y="2377440"/>
+            <a:ext cx="2770632" cy="1115568"/>
+          </a:xfrm>
+          <a:prstGeom prst="rect">
+            <a:avLst/>
+          </a:prstGeom>
+          <a:noFill/>
+          <a:ln/>
+        </p:spPr>
+        <p:txBody>
+          <a:bodyPr wrap="square" lIns="0" tIns="0" rIns="0" bIns="0" rtlCol="0" anchor="t"/>
+          <a:lstStyle/>
+          <a:p>
+            <a:pPr indent="0" marL="0">
+              <a:buNone/>
+            </a:pPr>
+            <a:r>
+              <a:rPr lang="en-US" sz="1350" dirty="0">
+                <a:solidFill>
+                  <a:schemeClr val="tx1"/>
+                </a:solidFill>
+              </a:rPr>
+              <a:t>Where a wording covers more than one product, it says which.</a:t>
+            </a:r>
+            <a:endParaRPr lang="en-US" sz="1350" dirty="0"/>
+          </a:p>
+        </p:txBody>
+      </p:sp>
+      <p:sp>
+        <p:nvSpPr>
+          <p:cNvPr id="11" name="Step 3 marker"/>
+          <p:cNvSpPr/>
+          <p:nvPr/>
+        </p:nvSpPr>
+        <p:spPr>
+          <a:xfrm>
+            <a:off x="8503920" y="3584448"/>
+            <a:ext cx="347472" cy="347472"/>
+          </a:xfrm>
+          <a:prstGeom prst="ellipse">
+            <a:avLst/>
+          </a:prstGeom>
+          <a:solidFill>
+            <a:schemeClr val="accent3"/>
+          </a:solidFill>
+          <a:ln w="12700">
+            <a:solidFill>
+              <a:schemeClr val="accent3"/>
+            </a:solidFill>
+            <a:prstDash val="solid"/>
+          </a:ln>
+        </p:spPr>
+      </p:sp>
+      <p:sp>
+        <p:nvSpPr>
+          <p:cNvPr id="12" name="Step 3 number"/>
+          <p:cNvSpPr txBox="1"/>
+          <p:nvPr/>
+        </p:nvSpPr>
+        <p:spPr>
+          <a:xfrm>
+            <a:off x="8503920" y="3584448"/>
+            <a:ext cx="347472" cy="347472"/>
+          </a:xfrm>
+          <a:prstGeom prst="rect">
+            <a:avLst/>
+          </a:prstGeom>
+          <a:noFill/>
+          <a:ln/>
+        </p:spPr>
+        <p:txBody>
+          <a:bodyPr wrap="square" lIns="0" tIns="0" rIns="0" bIns="0" rtlCol="0" anchor="ctr"/>
+          <a:lstStyle/>
+          <a:p>
+            <a:pPr algn="ctr" indent="0" marL="0">
+              <a:buNone/>
+            </a:pPr>
+            <a:r>
+              <a:rPr lang="en-US" sz="1300" b="1" dirty="0">
+                <a:solidFill>
+                  <a:schemeClr val="bg1"/>
+                </a:solidFill>
+              </a:rPr>
+              <a:t>3</a:t>
+            </a:r>
+            <a:endParaRPr lang="en-US" sz="1300" dirty="0"/>
+          </a:p>
+        </p:txBody>
+      </p:sp>
+      <p:sp>
+        <p:nvSpPr>
+          <p:cNvPr id="13" name="Step 3 text"/>
+          <p:cNvSpPr txBox="1"/>
+          <p:nvPr/>
+        </p:nvSpPr>
+        <p:spPr>
+          <a:xfrm>
+            <a:off x="8979408" y="3566160"/>
+            <a:ext cx="2770632" cy="1115568"/>
+          </a:xfrm>
+          <a:prstGeom prst="rect">
+            <a:avLst/>
+          </a:prstGeom>
+          <a:noFill/>
+          <a:ln/>
+        </p:spPr>
+        <p:txBody>
+          <a:bodyPr wrap="square" lIns="0" tIns="0" rIns="0" bIns="0" rtlCol="0" anchor="t"/>
+          <a:lstStyle/>
+          <a:p>
+            <a:pPr indent="0" marL="0">
+              <a:buNone/>
+            </a:pPr>
+            <a:r>
+              <a:rPr lang="en-US" sz="1350" dirty="0">
+                <a:solidFill>
+                  <a:schemeClr val="tx1"/>
+                </a:solidFill>
+              </a:rPr>
+              <a:t>View or download the wording.</a:t>
+            </a:r>
+            <a:endParaRPr lang="en-US" sz="1350" dirty="0"/>
+          </a:p>
+        </p:txBody>
+      </p:sp>
+      <p:sp>
+        <p:nvSpPr>
+          <p:cNvPr id="25" name="Slide Number Placeholder 0"/>
+          <p:cNvSpPr>
+            <a:spLocks noGrp="1"/>
+          </p:cNvSpPr>
+          <p:nvPr>
+            <p:ph type="sldNum" sz="quarter" idx="4294967295"/>
+          </p:nvPr>
+        </p:nvSpPr>
+        <p:spPr>
+          <a:xfrm>
+            <a:off x="11201400" y="6446520"/>
+            <a:ext cx="548640" cy="274320"/>
+          </a:xfrm>
+          <a:prstGeom prst="rect">
+            <a:avLst/>
+          </a:prstGeom>
+          <a:extLst>
+            <a:ext uri="{C572A759-6A51-4108-AA02-DFA0A04FC94B}">
+              <ma14:wrappingTextBoxFlag xmlns:ma14="http://schemas.microsoft.com/office/mac/drawingml/2011/main" val="0"/>
+            </a:ext>
+          </a:extLst>
+        </p:spPr>
+        <p:txBody>
+          <a:bodyPr/>
+          <a:lstStyle>
+            <a:lvl1pPr>
+              <a:defRPr sz="1000">
+                <a:solidFill>
+                  <a:srgbClr val="6B6E72"/>
+                </a:solidFill>
+              </a:defRPr>
+            </a:lvl1pPr>
+          </a:lstStyle>
+          <a:p>
+            <a:pPr algn="r"/>
+            <a:fld id="{F7021451-1387-4CA6-816F-3879F97B5CBC}" type="slidenum">
+              <a:rPr b="0" lang="en-US"/>
+              <a:t>25</a:t>
+            </a:fld>
+            <a:endParaRPr lang="en-US"/>
+          </a:p>
+        </p:txBody>
+      </p:sp>
+    </p:spTree>
+  </p:cSld>
+  <p:clrMapOvr>
+    <a:masterClrMapping/>
+  </p:clrMapOvr>
+</p:sld>
+</file>
+
+<file path=ppt/slides/slide26.xml><?xml version="1.0" encoding="utf-8"?>
+<p:sld xmlns:a="http://schemas.openxmlformats.org/drawingml/2006/main" xmlns:r="http://schemas.openxmlformats.org/officeDocument/2006/relationships" xmlns:p="http://schemas.openxmlformats.org/presentationml/2006/main">
+  <p:cSld name="Slide 26">
+    <p:spTree>
+      <p:nvGrpSpPr>
+        <p:cNvPr id="1" name=""/>
+        <p:cNvGrpSpPr/>
+        <p:nvPr/>
+      </p:nvGrpSpPr>
+      <p:grpSpPr>
+        <a:xfrm>
+          <a:off x="0" y="0"/>
+          <a:ext cx="0" cy="0"/>
+          <a:chOff x="0" y="0"/>
+          <a:chExt cx="0" cy="0"/>
+        </a:xfrm>
+      </p:grpSpPr>
+      <p:sp>
+        <p:nvSpPr>
+          <p:cNvPr id="2" name="Text 0"/>
+          <p:cNvSpPr/>
+          <p:nvPr>
+            <p:ph idx="101" type="title" hasCustomPrompt="1"/>
+          </p:nvPr>
+        </p:nvSpPr>
+        <p:spPr>
+          <a:xfrm>
+            <a:off x="457200" y="274320"/>
+            <a:ext cx="10058400" cy="685800"/>
+          </a:xfrm>
+          <a:prstGeom prst="rect">
+            <a:avLst/>
+          </a:prstGeom>
+          <a:noFill/>
+          <a:ln/>
+        </p:spPr>
+        <p:txBody>
+          <a:bodyPr wrap="square" lIns="0" tIns="0" rIns="0" bIns="0" rtlCol="0" anchor="ctr"/>
+          <a:lstStyle/>
+          <a:p>
+            <a:pPr algn="l" indent="0" marL="0">
+              <a:buNone/>
+            </a:pPr>
+            <a:r>
+              <a:rPr lang="en-US" sz="2800" b="1" dirty="0">
+                <a:solidFill>
+                  <a:schemeClr val="tx2"/>
+                </a:solidFill>
+              </a:rPr>
+              <a:t>Training</a:t>
+            </a:r>
+            <a:endParaRPr lang="en-US" sz="2800" dirty="0"/>
+          </a:p>
+        </p:txBody>
+      </p:sp>
+      <p:sp>
+        <p:nvSpPr>
+          <p:cNvPr id="3" name="Screenshot frame"/>
+          <p:cNvSpPr/>
+          <p:nvPr/>
+        </p:nvSpPr>
+        <p:spPr>
+          <a:xfrm>
+            <a:off x="402336" y="1133856"/>
+            <a:ext cx="7790688" cy="4910328"/>
+          </a:xfrm>
+          <a:prstGeom prst="rect">
+            <a:avLst/>
+          </a:prstGeom>
+          <a:solidFill>
+            <a:schemeClr val="bg1"/>
+          </a:solidFill>
+          <a:ln w="12700">
+            <a:solidFill>
+              <a:srgbClr val="D5DFDD"/>
+            </a:solidFill>
+            <a:prstDash val="solid"/>
+          </a:ln>
+          <a:effectLst>
+            <a:outerShdw sx="100000" sy="100000" kx="0" ky="0" algn="bl" rotWithShape="0" blurRad="76200" dist="25400" dir="5400000">
+              <a:srgbClr val="000000">
+                <a:alpha val="12000"/>
+              </a:srgbClr>
+            </a:outerShdw>
+          </a:effectLst>
+        </p:spPr>
+      </p:sp>
+      <p:pic>
+        <p:nvPicPr>
+          <p:cNvPr id="4" name="Screenshot" descr="Training: screenshot with numbered callouts">    </p:cNvPr>
+          <p:cNvPicPr>
+            <a:picLocks noChangeAspect="1"/>
+          </p:cNvPicPr>
+          <p:nvPr/>
+        </p:nvPicPr>
+        <p:blipFill>
+          <a:blip r:embed="rId1"/>
+          <a:stretch>
+            <a:fillRect/>
+          </a:stretch>
+        </p:blipFill>
+        <p:spPr>
+          <a:xfrm>
+            <a:off x="457200" y="1188720"/>
+            <a:ext cx="7680960" cy="4800600"/>
+          </a:xfrm>
+          <a:prstGeom prst="rect">
+            <a:avLst/>
+          </a:prstGeom>
+        </p:spPr>
+      </p:pic>
+      <p:sp>
+        <p:nvSpPr>
+          <p:cNvPr id="5" name="Step 1 marker"/>
+          <p:cNvSpPr/>
+          <p:nvPr/>
+        </p:nvSpPr>
+        <p:spPr>
+          <a:xfrm>
+            <a:off x="8503920" y="1207008"/>
+            <a:ext cx="347472" cy="347472"/>
+          </a:xfrm>
+          <a:prstGeom prst="ellipse">
+            <a:avLst/>
+          </a:prstGeom>
+          <a:solidFill>
+            <a:schemeClr val="accent3"/>
+          </a:solidFill>
+          <a:ln w="12700">
+            <a:solidFill>
+              <a:schemeClr val="accent3"/>
+            </a:solidFill>
+            <a:prstDash val="solid"/>
+          </a:ln>
+        </p:spPr>
+      </p:sp>
+      <p:sp>
+        <p:nvSpPr>
+          <p:cNvPr id="6" name="Step 1 number"/>
+          <p:cNvSpPr txBox="1"/>
+          <p:nvPr/>
+        </p:nvSpPr>
+        <p:spPr>
+          <a:xfrm>
+            <a:off x="8503920" y="1207008"/>
+            <a:ext cx="347472" cy="347472"/>
+          </a:xfrm>
+          <a:prstGeom prst="rect">
+            <a:avLst/>
+          </a:prstGeom>
+          <a:noFill/>
+          <a:ln/>
+        </p:spPr>
+        <p:txBody>
+          <a:bodyPr wrap="square" lIns="0" tIns="0" rIns="0" bIns="0" rtlCol="0" anchor="ctr"/>
+          <a:lstStyle/>
+          <a:p>
+            <a:pPr algn="ctr" indent="0" marL="0">
+              <a:buNone/>
+            </a:pPr>
+            <a:r>
+              <a:rPr lang="en-US" sz="1300" b="1" dirty="0">
+                <a:solidFill>
+                  <a:schemeClr val="bg1"/>
+                </a:solidFill>
+              </a:rPr>
+              <a:t>1</a:t>
+            </a:r>
+            <a:endParaRPr lang="en-US" sz="1300" dirty="0"/>
+          </a:p>
+        </p:txBody>
+      </p:sp>
+      <p:sp>
+        <p:nvSpPr>
+          <p:cNvPr id="7" name="Step 1 text"/>
+          <p:cNvSpPr txBox="1"/>
+          <p:nvPr/>
+        </p:nvSpPr>
+        <p:spPr>
+          <a:xfrm>
+            <a:off x="8979408" y="1188720"/>
+            <a:ext cx="2770632" cy="1115568"/>
+          </a:xfrm>
+          <a:prstGeom prst="rect">
+            <a:avLst/>
+          </a:prstGeom>
+          <a:noFill/>
+          <a:ln/>
+        </p:spPr>
+        <p:txBody>
+          <a:bodyPr wrap="square" lIns="0" tIns="0" rIns="0" bIns="0" rtlCol="0" anchor="t"/>
+          <a:lstStyle/>
+          <a:p>
+            <a:pPr indent="0" marL="0">
+              <a:buNone/>
+            </a:pPr>
+            <a:r>
+              <a:rPr lang="en-US" sz="1350" dirty="0">
+                <a:solidFill>
+                  <a:schemeClr val="tx1"/>
+                </a:solidFill>
+              </a:rPr>
+              <a:t>Download the broker guide as a PDF.</a:t>
+            </a:r>
+            <a:endParaRPr lang="en-US" sz="1350" dirty="0"/>
+          </a:p>
+        </p:txBody>
+      </p:sp>
+      <p:sp>
+        <p:nvSpPr>
+          <p:cNvPr id="8" name="Step 2 marker"/>
+          <p:cNvSpPr/>
+          <p:nvPr/>
+        </p:nvSpPr>
+        <p:spPr>
+          <a:xfrm>
+            <a:off x="8503920" y="2395728"/>
+            <a:ext cx="347472" cy="347472"/>
+          </a:xfrm>
+          <a:prstGeom prst="ellipse">
+            <a:avLst/>
+          </a:prstGeom>
+          <a:solidFill>
+            <a:schemeClr val="accent3"/>
+          </a:solidFill>
+          <a:ln w="12700">
+            <a:solidFill>
+              <a:schemeClr val="accent3"/>
+            </a:solidFill>
+            <a:prstDash val="solid"/>
+          </a:ln>
+        </p:spPr>
+      </p:sp>
+      <p:sp>
+        <p:nvSpPr>
+          <p:cNvPr id="9" name="Step 2 number"/>
+          <p:cNvSpPr txBox="1"/>
+          <p:nvPr/>
+        </p:nvSpPr>
+        <p:spPr>
+          <a:xfrm>
+            <a:off x="8503920" y="2395728"/>
+            <a:ext cx="347472" cy="347472"/>
+          </a:xfrm>
+          <a:prstGeom prst="rect">
+            <a:avLst/>
+          </a:prstGeom>
+          <a:noFill/>
+          <a:ln/>
+        </p:spPr>
+        <p:txBody>
+          <a:bodyPr wrap="square" lIns="0" tIns="0" rIns="0" bIns="0" rtlCol="0" anchor="ctr"/>
+          <a:lstStyle/>
+          <a:p>
+            <a:pPr algn="ctr" indent="0" marL="0">
+              <a:buNone/>
+            </a:pPr>
+            <a:r>
+              <a:rPr lang="en-US" sz="1300" b="1" dirty="0">
+                <a:solidFill>
+                  <a:schemeClr val="bg1"/>
+                </a:solidFill>
+              </a:rPr>
+              <a:t>2</a:t>
+            </a:r>
+            <a:endParaRPr lang="en-US" sz="1300" dirty="0"/>
+          </a:p>
+        </p:txBody>
+      </p:sp>
+      <p:sp>
+        <p:nvSpPr>
+          <p:cNvPr id="10" name="Step 2 text"/>
+          <p:cNvSpPr txBox="1"/>
+          <p:nvPr/>
+        </p:nvSpPr>
+        <p:spPr>
+          <a:xfrm>
+            <a:off x="8979408" y="2377440"/>
+            <a:ext cx="2770632" cy="1115568"/>
+          </a:xfrm>
+          <a:prstGeom prst="rect">
+            <a:avLst/>
+          </a:prstGeom>
+          <a:noFill/>
+          <a:ln/>
+        </p:spPr>
+        <p:txBody>
+          <a:bodyPr wrap="square" lIns="0" tIns="0" rIns="0" bIns="0" rtlCol="0" anchor="t"/>
+          <a:lstStyle/>
+          <a:p>
+            <a:pPr indent="0" marL="0">
+              <a:buNone/>
+            </a:pPr>
+            <a:r>
+              <a:rPr lang="en-US" sz="1350" dirty="0">
+                <a:solidFill>
+                  <a:schemeClr val="tx1"/>
+                </a:solidFill>
+              </a:rPr>
+              <a:t>Getting started in five steps.</a:t>
+            </a:r>
+            <a:endParaRPr lang="en-US" sz="1350" dirty="0"/>
+          </a:p>
+        </p:txBody>
+      </p:sp>
+      <p:sp>
+        <p:nvSpPr>
+          <p:cNvPr id="11" name="Step 3 marker"/>
+          <p:cNvSpPr/>
+          <p:nvPr/>
+        </p:nvSpPr>
+        <p:spPr>
+          <a:xfrm>
+            <a:off x="8503920" y="3584448"/>
+            <a:ext cx="347472" cy="347472"/>
+          </a:xfrm>
+          <a:prstGeom prst="ellipse">
+            <a:avLst/>
+          </a:prstGeom>
+          <a:solidFill>
+            <a:schemeClr val="accent3"/>
+          </a:solidFill>
+          <a:ln w="12700">
+            <a:solidFill>
+              <a:schemeClr val="accent3"/>
+            </a:solidFill>
+            <a:prstDash val="solid"/>
+          </a:ln>
+        </p:spPr>
+      </p:sp>
+      <p:sp>
+        <p:nvSpPr>
+          <p:cNvPr id="12" name="Step 3 number"/>
+          <p:cNvSpPr txBox="1"/>
+          <p:nvPr/>
+        </p:nvSpPr>
+        <p:spPr>
+          <a:xfrm>
+            <a:off x="8503920" y="3584448"/>
+            <a:ext cx="347472" cy="347472"/>
+          </a:xfrm>
+          <a:prstGeom prst="rect">
+            <a:avLst/>
+          </a:prstGeom>
+          <a:noFill/>
+          <a:ln/>
+        </p:spPr>
+        <p:txBody>
+          <a:bodyPr wrap="square" lIns="0" tIns="0" rIns="0" bIns="0" rtlCol="0" anchor="ctr"/>
+          <a:lstStyle/>
+          <a:p>
+            <a:pPr algn="ctr" indent="0" marL="0">
+              <a:buNone/>
+            </a:pPr>
+            <a:r>
+              <a:rPr lang="en-US" sz="1300" b="1" dirty="0">
+                <a:solidFill>
+                  <a:schemeClr val="bg1"/>
+                </a:solidFill>
+              </a:rPr>
+              <a:t>3</a:t>
+            </a:r>
+            <a:endParaRPr lang="en-US" sz="1300" dirty="0"/>
+          </a:p>
+        </p:txBody>
+      </p:sp>
+      <p:sp>
+        <p:nvSpPr>
+          <p:cNvPr id="13" name="Step 3 text"/>
+          <p:cNvSpPr txBox="1"/>
+          <p:nvPr/>
+        </p:nvSpPr>
+        <p:spPr>
+          <a:xfrm>
+            <a:off x="8979408" y="3566160"/>
+            <a:ext cx="2770632" cy="1115568"/>
+          </a:xfrm>
+          <a:prstGeom prst="rect">
+            <a:avLst/>
+          </a:prstGeom>
+          <a:noFill/>
+          <a:ln/>
+        </p:spPr>
+        <p:txBody>
+          <a:bodyPr wrap="square" lIns="0" tIns="0" rIns="0" bIns="0" rtlCol="0" anchor="t"/>
+          <a:lstStyle/>
+          <a:p>
+            <a:pPr indent="0" marL="0">
+              <a:buNone/>
+            </a:pPr>
+            <a:r>
+              <a:rPr lang="en-US" sz="1350" dirty="0">
+                <a:solidFill>
+                  <a:schemeClr val="tx1"/>
+                </a:solidFill>
+              </a:rPr>
+              <a:t>A walkthrough of each part of the portal, with screenshots.</a:t>
+            </a:r>
+            <a:endParaRPr lang="en-US" sz="1350" dirty="0"/>
+          </a:p>
+        </p:txBody>
+      </p:sp>
+      <p:sp>
+        <p:nvSpPr>
+          <p:cNvPr id="25" name="Slide Number Placeholder 0"/>
+          <p:cNvSpPr>
+            <a:spLocks noGrp="1"/>
+          </p:cNvSpPr>
+          <p:nvPr>
+            <p:ph type="sldNum" sz="quarter" idx="4294967295"/>
+          </p:nvPr>
+        </p:nvSpPr>
+        <p:spPr>
+          <a:xfrm>
+            <a:off x="11201400" y="6446520"/>
+            <a:ext cx="548640" cy="274320"/>
+          </a:xfrm>
+          <a:prstGeom prst="rect">
+            <a:avLst/>
+          </a:prstGeom>
+          <a:extLst>
+            <a:ext uri="{C572A759-6A51-4108-AA02-DFA0A04FC94B}">
+              <ma14:wrappingTextBoxFlag xmlns:ma14="http://schemas.microsoft.com/office/mac/drawingml/2011/main" val="0"/>
+            </a:ext>
+          </a:extLst>
+        </p:spPr>
+        <p:txBody>
+          <a:bodyPr/>
+          <a:lstStyle>
+            <a:lvl1pPr>
+              <a:defRPr sz="1000">
+                <a:solidFill>
+                  <a:srgbClr val="6B6E72"/>
+                </a:solidFill>
+              </a:defRPr>
+            </a:lvl1pPr>
+          </a:lstStyle>
+          <a:p>
+            <a:pPr algn="r"/>
+            <a:fld id="{F7021451-1387-4CA6-816F-3879F97B5CBC}" type="slidenum">
+              <a:rPr b="0" lang="en-US"/>
+              <a:t>26</a:t>
+            </a:fld>
+            <a:endParaRPr lang="en-US"/>
+          </a:p>
+        </p:txBody>
+      </p:sp>
+    </p:spTree>
+  </p:cSld>
+  <p:clrMapOvr>
+    <a:masterClrMapping/>
+  </p:clrMapOvr>
+</p:sld>
+</file>
+
+<file path=ppt/slides/slide27.xml><?xml version="1.0" encoding="utf-8"?>
+<p:sld xmlns:a="http://schemas.openxmlformats.org/drawingml/2006/main" xmlns:r="http://schemas.openxmlformats.org/officeDocument/2006/relationships" xmlns:p="http://schemas.openxmlformats.org/presentationml/2006/main">
+  <p:cSld name="Slide 27">
+    <p:spTree>
+      <p:nvGrpSpPr>
+        <p:cNvPr id="1" name=""/>
+        <p:cNvGrpSpPr/>
+        <p:nvPr/>
+      </p:nvGrpSpPr>
+      <p:grpSpPr>
+        <a:xfrm>
+          <a:off x="0" y="0"/>
+          <a:ext cx="0" cy="0"/>
+          <a:chOff x="0" y="0"/>
+          <a:chExt cx="0" cy="0"/>
+        </a:xfrm>
+      </p:grpSpPr>
+      <p:sp>
+        <p:nvSpPr>
+          <p:cNvPr id="2" name="Text 0"/>
+          <p:cNvSpPr/>
+          <p:nvPr>
+            <p:ph idx="101" type="title" hasCustomPrompt="1"/>
+          </p:nvPr>
+        </p:nvSpPr>
+        <p:spPr>
+          <a:xfrm>
+            <a:off x="457200" y="274320"/>
+            <a:ext cx="10058400" cy="685800"/>
+          </a:xfrm>
+          <a:prstGeom prst="rect">
+            <a:avLst/>
+          </a:prstGeom>
+          <a:noFill/>
+          <a:ln/>
+        </p:spPr>
+        <p:txBody>
+          <a:bodyPr wrap="square" lIns="0" tIns="0" rIns="0" bIns="0" rtlCol="0" anchor="ctr"/>
+          <a:lstStyle/>
+          <a:p>
+            <a:pPr algn="l" indent="0" marL="0">
+              <a:buNone/>
+            </a:pPr>
+            <a:r>
+              <a:rPr lang="en-US" sz="2800" b="1" dirty="0">
+                <a:solidFill>
+                  <a:schemeClr val="tx2"/>
+                </a:solidFill>
+              </a:rPr>
+              <a:t>Help and contact</a:t>
+            </a:r>
+            <a:endParaRPr lang="en-US" sz="2800" dirty="0"/>
+          </a:p>
+        </p:txBody>
+      </p:sp>
+      <p:sp>
+        <p:nvSpPr>
+          <p:cNvPr id="3" name="Screenshot frame"/>
+          <p:cNvSpPr/>
+          <p:nvPr/>
+        </p:nvSpPr>
+        <p:spPr>
+          <a:xfrm>
+            <a:off x="402336" y="1133856"/>
+            <a:ext cx="7790688" cy="4910328"/>
+          </a:xfrm>
+          <a:prstGeom prst="rect">
+            <a:avLst/>
+          </a:prstGeom>
+          <a:solidFill>
+            <a:schemeClr val="bg1"/>
+          </a:solidFill>
+          <a:ln w="12700">
+            <a:solidFill>
+              <a:srgbClr val="D5DFDD"/>
+            </a:solidFill>
+            <a:prstDash val="solid"/>
+          </a:ln>
+          <a:effectLst>
+            <a:outerShdw sx="100000" sy="100000" kx="0" ky="0" algn="bl" rotWithShape="0" blurRad="76200" dist="25400" dir="5400000">
+              <a:srgbClr val="000000">
+                <a:alpha val="12000"/>
+              </a:srgbClr>
+            </a:outerShdw>
+          </a:effectLst>
+        </p:spPr>
+      </p:sp>
+      <p:pic>
+        <p:nvPicPr>
+          <p:cNvPr id="4" name="Screenshot" descr="Help and contact: screenshot with numbered callouts">    </p:cNvPr>
+          <p:cNvPicPr>
+            <a:picLocks noChangeAspect="1"/>
+          </p:cNvPicPr>
+          <p:nvPr/>
+        </p:nvPicPr>
+        <p:blipFill>
+          <a:blip r:embed="rId1"/>
+          <a:stretch>
+            <a:fillRect/>
+          </a:stretch>
+        </p:blipFill>
+        <p:spPr>
+          <a:xfrm>
+            <a:off x="457200" y="1188720"/>
+            <a:ext cx="7680960" cy="4800600"/>
+          </a:xfrm>
+          <a:prstGeom prst="rect">
+            <a:avLst/>
+          </a:prstGeom>
+        </p:spPr>
+      </p:pic>
+      <p:sp>
+        <p:nvSpPr>
+          <p:cNvPr id="5" name="Step 1 marker"/>
+          <p:cNvSpPr/>
+          <p:nvPr/>
+        </p:nvSpPr>
+        <p:spPr>
+          <a:xfrm>
+            <a:off x="8503920" y="1207008"/>
+            <a:ext cx="347472" cy="347472"/>
+          </a:xfrm>
+          <a:prstGeom prst="ellipse">
+            <a:avLst/>
+          </a:prstGeom>
+          <a:solidFill>
+            <a:schemeClr val="accent3"/>
+          </a:solidFill>
+          <a:ln w="12700">
+            <a:solidFill>
+              <a:schemeClr val="accent3"/>
+            </a:solidFill>
+            <a:prstDash val="solid"/>
+          </a:ln>
+        </p:spPr>
+      </p:sp>
+      <p:sp>
+        <p:nvSpPr>
+          <p:cNvPr id="6" name="Step 1 number"/>
+          <p:cNvSpPr txBox="1"/>
+          <p:nvPr/>
+        </p:nvSpPr>
+        <p:spPr>
+          <a:xfrm>
+            <a:off x="8503920" y="1207008"/>
+            <a:ext cx="347472" cy="347472"/>
+          </a:xfrm>
+          <a:prstGeom prst="rect">
+            <a:avLst/>
+          </a:prstGeom>
+          <a:noFill/>
+          <a:ln/>
+        </p:spPr>
+        <p:txBody>
+          <a:bodyPr wrap="square" lIns="0" tIns="0" rIns="0" bIns="0" rtlCol="0" anchor="ctr"/>
+          <a:lstStyle/>
+          <a:p>
+            <a:pPr algn="ctr" indent="0" marL="0">
+              <a:buNone/>
+            </a:pPr>
+            <a:r>
+              <a:rPr lang="en-US" sz="1300" b="1" dirty="0">
+                <a:solidFill>
+                  <a:schemeClr val="bg1"/>
+                </a:solidFill>
+              </a:rPr>
+              <a:t>1</a:t>
+            </a:r>
+            <a:endParaRPr lang="en-US" sz="1300" dirty="0"/>
+          </a:p>
+        </p:txBody>
+      </p:sp>
+      <p:sp>
+        <p:nvSpPr>
+          <p:cNvPr id="7" name="Step 1 text"/>
+          <p:cNvSpPr txBox="1"/>
+          <p:nvPr/>
+        </p:nvSpPr>
+        <p:spPr>
+          <a:xfrm>
+            <a:off x="8979408" y="1188720"/>
+            <a:ext cx="2770632" cy="1115568"/>
+          </a:xfrm>
+          <a:prstGeom prst="rect">
+            <a:avLst/>
+          </a:prstGeom>
+          <a:noFill/>
+          <a:ln/>
+        </p:spPr>
+        <p:txBody>
+          <a:bodyPr wrap="square" lIns="0" tIns="0" rIns="0" bIns="0" rtlCol="0" anchor="t"/>
+          <a:lstStyle/>
+          <a:p>
+            <a:pPr indent="0" marL="0">
+              <a:buNone/>
+            </a:pPr>
+            <a:r>
+              <a:rPr lang="en-US" sz="1350" dirty="0">
+                <a:solidFill>
+                  <a:schemeClr val="tx1"/>
+                </a:solidFill>
+              </a:rPr>
+              <a:t>Email the right underwriting team directly.</a:t>
+            </a:r>
+            <a:endParaRPr lang="en-US" sz="1350" dirty="0"/>
+          </a:p>
+        </p:txBody>
+      </p:sp>
+      <p:sp>
+        <p:nvSpPr>
+          <p:cNvPr id="8" name="Step 2 marker"/>
+          <p:cNvSpPr/>
+          <p:nvPr/>
+        </p:nvSpPr>
+        <p:spPr>
+          <a:xfrm>
+            <a:off x="8503920" y="2395728"/>
+            <a:ext cx="347472" cy="347472"/>
+          </a:xfrm>
+          <a:prstGeom prst="ellipse">
+            <a:avLst/>
+          </a:prstGeom>
+          <a:solidFill>
+            <a:schemeClr val="accent3"/>
+          </a:solidFill>
+          <a:ln w="12700">
+            <a:solidFill>
+              <a:schemeClr val="accent3"/>
+            </a:solidFill>
+            <a:prstDash val="solid"/>
+          </a:ln>
+        </p:spPr>
+      </p:sp>
+      <p:sp>
+        <p:nvSpPr>
+          <p:cNvPr id="9" name="Step 2 number"/>
+          <p:cNvSpPr txBox="1"/>
+          <p:nvPr/>
+        </p:nvSpPr>
+        <p:spPr>
+          <a:xfrm>
+            <a:off x="8503920" y="2395728"/>
+            <a:ext cx="347472" cy="347472"/>
+          </a:xfrm>
+          <a:prstGeom prst="rect">
+            <a:avLst/>
+          </a:prstGeom>
+          <a:noFill/>
+          <a:ln/>
+        </p:spPr>
+        <p:txBody>
+          <a:bodyPr wrap="square" lIns="0" tIns="0" rIns="0" bIns="0" rtlCol="0" anchor="ctr"/>
+          <a:lstStyle/>
+          <a:p>
+            <a:pPr algn="ctr" indent="0" marL="0">
+              <a:buNone/>
+            </a:pPr>
+            <a:r>
+              <a:rPr lang="en-US" sz="1300" b="1" dirty="0">
+                <a:solidFill>
+                  <a:schemeClr val="bg1"/>
+                </a:solidFill>
+              </a:rPr>
+              <a:t>2</a:t>
+            </a:r>
+            <a:endParaRPr lang="en-US" sz="1300" dirty="0"/>
+          </a:p>
+        </p:txBody>
+      </p:sp>
+      <p:sp>
+        <p:nvSpPr>
+          <p:cNvPr id="10" name="Step 2 text"/>
+          <p:cNvSpPr txBox="1"/>
+          <p:nvPr/>
+        </p:nvSpPr>
+        <p:spPr>
+          <a:xfrm>
+            <a:off x="8979408" y="2377440"/>
+            <a:ext cx="2770632" cy="1115568"/>
+          </a:xfrm>
+          <a:prstGeom prst="rect">
+            <a:avLst/>
+          </a:prstGeom>
+          <a:noFill/>
+          <a:ln/>
+        </p:spPr>
+        <p:txBody>
+          <a:bodyPr wrap="square" lIns="0" tIns="0" rIns="0" bIns="0" rtlCol="0" anchor="t"/>
+          <a:lstStyle/>
+          <a:p>
+            <a:pPr indent="0" marL="0">
+              <a:buNone/>
+            </a:pPr>
+            <a:r>
+              <a:rPr lang="en-US" sz="1350" dirty="0">
+                <a:solidFill>
+                  <a:schemeClr val="tx1"/>
+                </a:solidFill>
+              </a:rPr>
+              <a:t>How colleagues get access, and how to reset a password.</a:t>
+            </a:r>
+            <a:endParaRPr lang="en-US" sz="1350" dirty="0"/>
+          </a:p>
+        </p:txBody>
+      </p:sp>
+      <p:sp>
+        <p:nvSpPr>
+          <p:cNvPr id="25" name="Slide Number Placeholder 0"/>
+          <p:cNvSpPr>
+            <a:spLocks noGrp="1"/>
+          </p:cNvSpPr>
+          <p:nvPr>
+            <p:ph type="sldNum" sz="quarter" idx="4294967295"/>
+          </p:nvPr>
+        </p:nvSpPr>
+        <p:spPr>
+          <a:xfrm>
+            <a:off x="11201400" y="6446520"/>
+            <a:ext cx="548640" cy="274320"/>
+          </a:xfrm>
+          <a:prstGeom prst="rect">
+            <a:avLst/>
+          </a:prstGeom>
+          <a:extLst>
+            <a:ext uri="{C572A759-6A51-4108-AA02-DFA0A04FC94B}">
+              <ma14:wrappingTextBoxFlag xmlns:ma14="http://schemas.microsoft.com/office/mac/drawingml/2011/main" val="0"/>
+            </a:ext>
+          </a:extLst>
+        </p:spPr>
+        <p:txBody>
+          <a:bodyPr/>
+          <a:lstStyle>
+            <a:lvl1pPr>
+              <a:defRPr sz="1000">
+                <a:solidFill>
+                  <a:srgbClr val="6B6E72"/>
+                </a:solidFill>
+              </a:defRPr>
+            </a:lvl1pPr>
+          </a:lstStyle>
+          <a:p>
+            <a:pPr algn="r"/>
+            <a:fld id="{F7021451-1387-4CA6-816F-3879F97B5CBC}" type="slidenum">
+              <a:rPr b="0" lang="en-US"/>
+              <a:t>27</a:t>
+            </a:fld>
+            <a:endParaRPr lang="en-US"/>
+          </a:p>
+        </p:txBody>
+      </p:sp>
+    </p:spTree>
+  </p:cSld>
+  <p:clrMapOvr>
+    <a:masterClrMapping/>
+  </p:clrMapOvr>
+</p:sld>
+</file>
+
+<file path=ppt/slides/slide28.xml><?xml version="1.0" encoding="utf-8"?>
+<p:sld xmlns:a="http://schemas.openxmlformats.org/drawingml/2006/main" xmlns:r="http://schemas.openxmlformats.org/officeDocument/2006/relationships" xmlns:p="http://schemas.openxmlformats.org/presentationml/2006/main">
+  <p:cSld name="Slide 28">
+    <p:spTree>
+      <p:nvGrpSpPr>
+        <p:cNvPr id="1" name=""/>
+        <p:cNvGrpSpPr/>
+        <p:nvPr/>
+      </p:nvGrpSpPr>
+      <p:grpSpPr>
+        <a:xfrm>
+          <a:off x="0" y="0"/>
+          <a:ext cx="0" cy="0"/>
+          <a:chOff x="0" y="0"/>
+          <a:chExt cx="0" cy="0"/>
+        </a:xfrm>
+      </p:grpSpPr>
+      <p:sp>
+        <p:nvSpPr>
+          <p:cNvPr id="2" name="Text 0"/>
+          <p:cNvSpPr/>
+          <p:nvPr>
+            <p:ph idx="101" type="title" hasCustomPrompt="1"/>
+          </p:nvPr>
+        </p:nvSpPr>
+        <p:spPr>
+          <a:xfrm>
+            <a:off x="457200" y="274320"/>
+            <a:ext cx="10058400" cy="685800"/>
+          </a:xfrm>
+          <a:prstGeom prst="rect">
+            <a:avLst/>
+          </a:prstGeom>
+          <a:noFill/>
+          <a:ln/>
+        </p:spPr>
+        <p:txBody>
+          <a:bodyPr wrap="square" lIns="0" tIns="0" rIns="0" bIns="0" rtlCol="0" anchor="ctr"/>
+          <a:lstStyle/>
+          <a:p>
+            <a:pPr algn="l" indent="0" marL="0">
+              <a:buNone/>
+            </a:pPr>
+            <a:r>
+              <a:rPr lang="en-US" sz="2800" b="1" dirty="0">
+                <a:solidFill>
+                  <a:schemeClr val="tx2"/>
+                </a:solidFill>
+              </a:rPr>
+              <a:t>Your account</a:t>
+            </a:r>
+            <a:endParaRPr lang="en-US" sz="2800" dirty="0"/>
+          </a:p>
+        </p:txBody>
+      </p:sp>
+      <p:sp>
+        <p:nvSpPr>
+          <p:cNvPr id="3" name="Screenshot frame"/>
+          <p:cNvSpPr/>
+          <p:nvPr/>
+        </p:nvSpPr>
+        <p:spPr>
+          <a:xfrm>
+            <a:off x="402336" y="1133856"/>
+            <a:ext cx="7790688" cy="4910328"/>
+          </a:xfrm>
+          <a:prstGeom prst="rect">
+            <a:avLst/>
+          </a:prstGeom>
+          <a:solidFill>
+            <a:schemeClr val="bg1"/>
+          </a:solidFill>
+          <a:ln w="12700">
+            <a:solidFill>
+              <a:srgbClr val="D5DFDD"/>
+            </a:solidFill>
+            <a:prstDash val="solid"/>
+          </a:ln>
+          <a:effectLst>
+            <a:outerShdw sx="100000" sy="100000" kx="0" ky="0" algn="bl" rotWithShape="0" blurRad="76200" dist="25400" dir="5400000">
+              <a:srgbClr val="000000">
+                <a:alpha val="12000"/>
+              </a:srgbClr>
+            </a:outerShdw>
+          </a:effectLst>
+        </p:spPr>
+      </p:sp>
+      <p:pic>
+        <p:nvPicPr>
+          <p:cNvPr id="4" name="Screenshot" descr="Your account: screenshot with numbered callouts">    </p:cNvPr>
+          <p:cNvPicPr>
+            <a:picLocks noChangeAspect="1"/>
+          </p:cNvPicPr>
+          <p:nvPr/>
+        </p:nvPicPr>
+        <p:blipFill>
+          <a:blip r:embed="rId1"/>
+          <a:stretch>
+            <a:fillRect/>
+          </a:stretch>
+        </p:blipFill>
+        <p:spPr>
+          <a:xfrm>
+            <a:off x="457200" y="1188720"/>
+            <a:ext cx="7680960" cy="4800600"/>
+          </a:xfrm>
+          <a:prstGeom prst="rect">
+            <a:avLst/>
+          </a:prstGeom>
+        </p:spPr>
+      </p:pic>
+      <p:sp>
+        <p:nvSpPr>
+          <p:cNvPr id="5" name="Step 1 marker"/>
+          <p:cNvSpPr/>
+          <p:nvPr/>
+        </p:nvSpPr>
+        <p:spPr>
+          <a:xfrm>
+            <a:off x="8503920" y="1207008"/>
+            <a:ext cx="347472" cy="347472"/>
+          </a:xfrm>
+          <a:prstGeom prst="ellipse">
+            <a:avLst/>
+          </a:prstGeom>
+          <a:solidFill>
+            <a:schemeClr val="accent3"/>
+          </a:solidFill>
+          <a:ln w="12700">
+            <a:solidFill>
+              <a:schemeClr val="accent3"/>
+            </a:solidFill>
+            <a:prstDash val="solid"/>
+          </a:ln>
+        </p:spPr>
+      </p:sp>
+      <p:sp>
+        <p:nvSpPr>
+          <p:cNvPr id="6" name="Step 1 number"/>
+          <p:cNvSpPr txBox="1"/>
+          <p:nvPr/>
+        </p:nvSpPr>
+        <p:spPr>
+          <a:xfrm>
+            <a:off x="8503920" y="1207008"/>
+            <a:ext cx="347472" cy="347472"/>
+          </a:xfrm>
+          <a:prstGeom prst="rect">
+            <a:avLst/>
+          </a:prstGeom>
+          <a:noFill/>
+          <a:ln/>
+        </p:spPr>
+        <p:txBody>
+          <a:bodyPr wrap="square" lIns="0" tIns="0" rIns="0" bIns="0" rtlCol="0" anchor="ctr"/>
+          <a:lstStyle/>
+          <a:p>
+            <a:pPr algn="ctr" indent="0" marL="0">
+              <a:buNone/>
+            </a:pPr>
+            <a:r>
+              <a:rPr lang="en-US" sz="1300" b="1" dirty="0">
+                <a:solidFill>
+                  <a:schemeClr val="bg1"/>
+                </a:solidFill>
+              </a:rPr>
+              <a:t>1</a:t>
+            </a:r>
+            <a:endParaRPr lang="en-US" sz="1300" dirty="0"/>
+          </a:p>
+        </p:txBody>
+      </p:sp>
+      <p:sp>
+        <p:nvSpPr>
+          <p:cNvPr id="7" name="Step 1 text"/>
+          <p:cNvSpPr txBox="1"/>
+          <p:nvPr/>
+        </p:nvSpPr>
+        <p:spPr>
+          <a:xfrm>
+            <a:off x="8979408" y="1188720"/>
+            <a:ext cx="2770632" cy="1115568"/>
+          </a:xfrm>
+          <a:prstGeom prst="rect">
+            <a:avLst/>
+          </a:prstGeom>
+          <a:noFill/>
+          <a:ln/>
+        </p:spPr>
+        <p:txBody>
+          <a:bodyPr wrap="square" lIns="0" tIns="0" rIns="0" bIns="0" rtlCol="0" anchor="t"/>
+          <a:lstStyle/>
+          <a:p>
+            <a:pPr indent="0" marL="0">
+              <a:buNone/>
+            </a:pPr>
+            <a:r>
+              <a:rPr lang="en-US" sz="1350" dirty="0">
+                <a:solidFill>
+                  <a:schemeClr val="tx1"/>
+                </a:solidFill>
+              </a:rPr>
+              <a:t>Your details.</a:t>
+            </a:r>
+            <a:endParaRPr lang="en-US" sz="1350" dirty="0"/>
+          </a:p>
+        </p:txBody>
+      </p:sp>
+      <p:sp>
+        <p:nvSpPr>
+          <p:cNvPr id="8" name="Step 2 marker"/>
+          <p:cNvSpPr/>
+          <p:nvPr/>
+        </p:nvSpPr>
+        <p:spPr>
+          <a:xfrm>
+            <a:off x="8503920" y="2395728"/>
+            <a:ext cx="347472" cy="347472"/>
+          </a:xfrm>
+          <a:prstGeom prst="ellipse">
+            <a:avLst/>
+          </a:prstGeom>
+          <a:solidFill>
+            <a:schemeClr val="accent3"/>
+          </a:solidFill>
+          <a:ln w="12700">
+            <a:solidFill>
+              <a:schemeClr val="accent3"/>
+            </a:solidFill>
+            <a:prstDash val="solid"/>
+          </a:ln>
+        </p:spPr>
+      </p:sp>
+      <p:sp>
+        <p:nvSpPr>
+          <p:cNvPr id="9" name="Step 2 number"/>
+          <p:cNvSpPr txBox="1"/>
+          <p:nvPr/>
+        </p:nvSpPr>
+        <p:spPr>
+          <a:xfrm>
+            <a:off x="8503920" y="2395728"/>
+            <a:ext cx="347472" cy="347472"/>
+          </a:xfrm>
+          <a:prstGeom prst="rect">
+            <a:avLst/>
+          </a:prstGeom>
+          <a:noFill/>
+          <a:ln/>
+        </p:spPr>
+        <p:txBody>
+          <a:bodyPr wrap="square" lIns="0" tIns="0" rIns="0" bIns="0" rtlCol="0" anchor="ctr"/>
+          <a:lstStyle/>
+          <a:p>
+            <a:pPr algn="ctr" indent="0" marL="0">
+              <a:buNone/>
+            </a:pPr>
+            <a:r>
+              <a:rPr lang="en-US" sz="1300" b="1" dirty="0">
+                <a:solidFill>
+                  <a:schemeClr val="bg1"/>
+                </a:solidFill>
+              </a:rPr>
+              <a:t>2</a:t>
+            </a:r>
+            <a:endParaRPr lang="en-US" sz="1300" dirty="0"/>
+          </a:p>
+        </p:txBody>
+      </p:sp>
+      <p:sp>
+        <p:nvSpPr>
+          <p:cNvPr id="10" name="Step 2 text"/>
+          <p:cNvSpPr txBox="1"/>
+          <p:nvPr/>
+        </p:nvSpPr>
+        <p:spPr>
+          <a:xfrm>
+            <a:off x="8979408" y="2377440"/>
+            <a:ext cx="2770632" cy="1115568"/>
+          </a:xfrm>
+          <a:prstGeom prst="rect">
+            <a:avLst/>
+          </a:prstGeom>
+          <a:noFill/>
+          <a:ln/>
+        </p:spPr>
+        <p:txBody>
+          <a:bodyPr wrap="square" lIns="0" tIns="0" rIns="0" bIns="0" rtlCol="0" anchor="t"/>
+          <a:lstStyle/>
+          <a:p>
+            <a:pPr indent="0" marL="0">
+              <a:buNone/>
+            </a:pPr>
+            <a:r>
+              <a:rPr lang="en-US" sz="1350" dirty="0">
+                <a:solidFill>
+                  <a:schemeClr val="tx1"/>
+                </a:solidFill>
+              </a:rPr>
+              <a:t>Choose a new password.</a:t>
+            </a:r>
+            <a:endParaRPr lang="en-US" sz="1350" dirty="0"/>
+          </a:p>
+        </p:txBody>
+      </p:sp>
+      <p:sp>
+        <p:nvSpPr>
+          <p:cNvPr id="11" name="Step 3 marker"/>
+          <p:cNvSpPr/>
+          <p:nvPr/>
+        </p:nvSpPr>
+        <p:spPr>
+          <a:xfrm>
+            <a:off x="8503920" y="3584448"/>
+            <a:ext cx="347472" cy="347472"/>
+          </a:xfrm>
+          <a:prstGeom prst="ellipse">
+            <a:avLst/>
+          </a:prstGeom>
+          <a:solidFill>
+            <a:schemeClr val="accent3"/>
+          </a:solidFill>
+          <a:ln w="12700">
+            <a:solidFill>
+              <a:schemeClr val="accent3"/>
+            </a:solidFill>
+            <a:prstDash val="solid"/>
+          </a:ln>
+        </p:spPr>
+      </p:sp>
+      <p:sp>
+        <p:nvSpPr>
+          <p:cNvPr id="12" name="Step 3 number"/>
+          <p:cNvSpPr txBox="1"/>
+          <p:nvPr/>
+        </p:nvSpPr>
+        <p:spPr>
+          <a:xfrm>
+            <a:off x="8503920" y="3584448"/>
+            <a:ext cx="347472" cy="347472"/>
+          </a:xfrm>
+          <a:prstGeom prst="rect">
+            <a:avLst/>
+          </a:prstGeom>
+          <a:noFill/>
+          <a:ln/>
+        </p:spPr>
+        <p:txBody>
+          <a:bodyPr wrap="square" lIns="0" tIns="0" rIns="0" bIns="0" rtlCol="0" anchor="ctr"/>
+          <a:lstStyle/>
+          <a:p>
+            <a:pPr algn="ctr" indent="0" marL="0">
+              <a:buNone/>
+            </a:pPr>
+            <a:r>
+              <a:rPr lang="en-US" sz="1300" b="1" dirty="0">
+                <a:solidFill>
+                  <a:schemeClr val="bg1"/>
+                </a:solidFill>
+              </a:rPr>
+              <a:t>3</a:t>
+            </a:r>
+            <a:endParaRPr lang="en-US" sz="1300" dirty="0"/>
+          </a:p>
+        </p:txBody>
+      </p:sp>
+      <p:sp>
+        <p:nvSpPr>
+          <p:cNvPr id="13" name="Step 3 text"/>
+          <p:cNvSpPr txBox="1"/>
+          <p:nvPr/>
+        </p:nvSpPr>
+        <p:spPr>
+          <a:xfrm>
+            <a:off x="8979408" y="3566160"/>
+            <a:ext cx="2770632" cy="1115568"/>
+          </a:xfrm>
+          <a:prstGeom prst="rect">
+            <a:avLst/>
+          </a:prstGeom>
+          <a:noFill/>
+          <a:ln/>
+        </p:spPr>
+        <p:txBody>
+          <a:bodyPr wrap="square" lIns="0" tIns="0" rIns="0" bIns="0" rtlCol="0" anchor="t"/>
+          <a:lstStyle/>
+          <a:p>
+            <a:pPr indent="0" marL="0">
+              <a:buNone/>
+            </a:pPr>
+            <a:r>
+              <a:rPr lang="en-US" sz="1350" dirty="0">
+                <a:solidFill>
+                  <a:schemeClr val="tx1"/>
+                </a:solidFill>
+              </a:rPr>
+              <a:t>Save new password.</a:t>
+            </a:r>
+            <a:endParaRPr lang="en-US" sz="1350" dirty="0"/>
+          </a:p>
+        </p:txBody>
+      </p:sp>
+      <p:sp>
+        <p:nvSpPr>
+          <p:cNvPr id="25" name="Slide Number Placeholder 0"/>
+          <p:cNvSpPr>
+            <a:spLocks noGrp="1"/>
+          </p:cNvSpPr>
+          <p:nvPr>
+            <p:ph type="sldNum" sz="quarter" idx="4294967295"/>
+          </p:nvPr>
+        </p:nvSpPr>
+        <p:spPr>
+          <a:xfrm>
+            <a:off x="11201400" y="6446520"/>
+            <a:ext cx="548640" cy="274320"/>
+          </a:xfrm>
+          <a:prstGeom prst="rect">
+            <a:avLst/>
+          </a:prstGeom>
+          <a:extLst>
+            <a:ext uri="{C572A759-6A51-4108-AA02-DFA0A04FC94B}">
+              <ma14:wrappingTextBoxFlag xmlns:ma14="http://schemas.microsoft.com/office/mac/drawingml/2011/main" val="0"/>
+            </a:ext>
+          </a:extLst>
+        </p:spPr>
+        <p:txBody>
+          <a:bodyPr/>
+          <a:lstStyle>
+            <a:lvl1pPr>
+              <a:defRPr sz="1000">
+                <a:solidFill>
+                  <a:srgbClr val="6B6E72"/>
+                </a:solidFill>
+              </a:defRPr>
+            </a:lvl1pPr>
+          </a:lstStyle>
+          <a:p>
+            <a:pPr algn="r"/>
+            <a:fld id="{F7021451-1387-4CA6-816F-3879F97B5CBC}" type="slidenum">
+              <a:rPr b="0" lang="en-US"/>
+              <a:t>28</a:t>
+            </a:fld>
+            <a:endParaRPr lang="en-US"/>
+          </a:p>
+        </p:txBody>
+      </p:sp>
+    </p:spTree>
+  </p:cSld>
+  <p:clrMapOvr>
+    <a:masterClrMapping/>
+  </p:clrMapOvr>
+</p:sld>
+</file>
+
+<file path=ppt/slides/slide29.xml><?xml version="1.0" encoding="utf-8"?>
+<p:sld xmlns:a="http://schemas.openxmlformats.org/drawingml/2006/main" xmlns:r="http://schemas.openxmlformats.org/officeDocument/2006/relationships" xmlns:p="http://schemas.openxmlformats.org/presentationml/2006/main">
+  <p:cSld name="Slide 29">
+    <p:spTree>
+      <p:nvGrpSpPr>
+        <p:cNvPr id="1" name=""/>
+        <p:cNvGrpSpPr/>
+        <p:nvPr/>
+      </p:nvGrpSpPr>
+      <p:grpSpPr>
+        <a:xfrm>
+          <a:off x="0" y="0"/>
+          <a:ext cx="0" cy="0"/>
+          <a:chOff x="0" y="0"/>
+          <a:chExt cx="0" cy="0"/>
+        </a:xfrm>
+      </p:grpSpPr>
+      <p:sp>
+        <p:nvSpPr>
           <p:cNvPr id="2" name="Text 0"/>
           <p:cNvSpPr/>
           <p:nvPr>
@@ -10387,7 +12906,7 @@
         </p:nvSpPr>
         <p:spPr>
           <a:xfrm>
-            <a:off x="731520" y="1664208"/>
+            <a:off x="731520" y="1668780"/>
             <a:ext cx="457200" cy="457200"/>
           </a:xfrm>
           <a:prstGeom prst="ellipse">
@@ -10412,7 +12931,7 @@
         </p:nvSpPr>
         <p:spPr>
           <a:xfrm>
-            <a:off x="731520" y="1664208"/>
+            <a:off x="731520" y="1668780"/>
             <a:ext cx="457200" cy="457200"/>
           </a:xfrm>
           <a:prstGeom prst="rect">
@@ -10511,7 +13030,7 @@
         </p:nvSpPr>
         <p:spPr>
           <a:xfrm>
-            <a:off x="731520" y="2807208"/>
+            <a:off x="731520" y="2811780"/>
             <a:ext cx="457200" cy="457200"/>
           </a:xfrm>
           <a:prstGeom prst="ellipse">
@@ -10536,7 +13055,7 @@
         </p:nvSpPr>
         <p:spPr>
           <a:xfrm>
-            <a:off x="731520" y="2807208"/>
+            <a:off x="731520" y="2811780"/>
             <a:ext cx="457200" cy="457200"/>
           </a:xfrm>
           <a:prstGeom prst="rect">
@@ -10594,7 +13113,7 @@
                   <a:schemeClr val="tx1"/>
                 </a:solidFill>
               </a:rPr>
-              <a:t>Forms can be completed online or sent to the client as a secure link.</a:t>
+              <a:t>Forms can be completed online, or the broker can send their client a secure link. Otta never contacts clients.</a:t>
             </a:r>
             <a:endParaRPr lang="en-US" sz="1800" dirty="0"/>
           </a:p>
@@ -10635,7 +13154,7 @@
         </p:nvSpPr>
         <p:spPr>
           <a:xfrm>
-            <a:off x="731520" y="3950208"/>
+            <a:off x="731520" y="3954780"/>
             <a:ext cx="457200" cy="457200"/>
           </a:xfrm>
           <a:prstGeom prst="ellipse">
@@ -10660,7 +13179,7 @@
         </p:nvSpPr>
         <p:spPr>
           <a:xfrm>
-            <a:off x="731520" y="3950208"/>
+            <a:off x="731520" y="3954780"/>
             <a:ext cx="457200" cy="457200"/>
           </a:xfrm>
           <a:prstGeom prst="rect">
@@ -10759,7 +13278,7 @@
         </p:nvSpPr>
         <p:spPr>
           <a:xfrm>
-            <a:off x="731520" y="5093208"/>
+            <a:off x="731520" y="5097780"/>
             <a:ext cx="457200" cy="457200"/>
           </a:xfrm>
           <a:prstGeom prst="ellipse">
@@ -10784,7 +13303,7 @@
         </p:nvSpPr>
         <p:spPr>
           <a:xfrm>
-            <a:off x="731520" y="5093208"/>
+            <a:off x="731520" y="5097780"/>
             <a:ext cx="457200" cy="457200"/>
           </a:xfrm>
           <a:prstGeom prst="rect">
@@ -10842,7 +13361,7 @@
                   <a:schemeClr val="tx1"/>
                 </a:solidFill>
               </a:rPr>
-              <a:t>Accepted quotes are bound with one instruction from the quote page.</a:t>
+              <a:t>Accepted quotes are bound with one instruction, and claims can be followed under Claims.</a:t>
             </a:r>
             <a:endParaRPr lang="en-US" sz="1800" dirty="0"/>
           </a:p>
@@ -10887,7 +13406,7 @@
             <a:pPr algn="r"/>
             <a:fld id="{F7021451-1387-4CA6-816F-3879F97B5CBC}" type="slidenum">
               <a:rPr b="0" lang="en-US"/>
-              <a:t>24</a:t>
+              <a:t>29</a:t>
             </a:fld>
             <a:endParaRPr lang="en-US"/>
           </a:p>
@@ -13384,7 +15903,7 @@
                   <a:schemeClr val="tx1"/>
                 </a:solidFill>
               </a:rPr>
-              <a:t>The menu: Dashboard, Applications, Forms, Quote requests, Policies, Documents, Help and Your account.</a:t>
+              <a:t>The menu: every part of the portal, including Claims, Policy wordings and Training.</a:t>
             </a:r>
             <a:endParaRPr lang="en-US" sz="1350" dirty="0"/>
           </a:p>
@@ -13481,7 +16000,7 @@
                   <a:schemeClr val="tx1"/>
                 </a:solidFill>
               </a:rPr>
-              <a:t>Open quote requests, active policies and renewals due. Select one to see the list.</a:t>
+              <a:t>Your active book: the annual premium of the brokerage's active Otta policies.</a:t>
             </a:r>
             <a:endParaRPr lang="en-US" sz="1350" dirty="0"/>
           </a:p>
@@ -13578,7 +16097,7 @@
                   <a:schemeClr val="tx1"/>
                 </a:solidFill>
               </a:rPr>
-              <a:t>Shortcuts to proposal forms, renewal declarations, claim forms and general forms.</a:t>
+              <a:t>Open quote requests, active policies and renewals due. Select one to see the list.</a:t>
             </a:r>
             <a:endParaRPr lang="en-US" sz="1350" dirty="0"/>
           </a:p>
@@ -13675,7 +16194,7 @@
                   <a:schemeClr val="tx1"/>
                 </a:solidFill>
               </a:rPr>
-              <a:t>Sign out.</a:t>
+              <a:t>Shortcuts to proposal forms, renewal declarations, claim forms and general forms.</a:t>
             </a:r>
             <a:endParaRPr lang="en-US" sz="1350" dirty="0"/>
           </a:p>
